--- a/lecons/F1/12_F1_M2_PW05_Solid_Waste_Management.pptx
+++ b/lecons/F1/12_F1_M2_PW05_Solid_Waste_Management.pptx
@@ -57,9 +57,13 @@
     <p:sldId id="305" r:id="rId51"/>
     <p:sldId id="306" r:id="rId52"/>
     <p:sldId id="307" r:id="rId53"/>
+    <p:sldId id="308" r:id="rId54"/>
+    <p:sldId id="309" r:id="rId55"/>
+    <p:sldId id="310" r:id="rId56"/>
+    <p:sldId id="311" r:id="rId57"/>
   </p:sldIdLst>
   <p:notesMasterIdLst>
-    <p:notesMasterId r:id="rId54"/>
+    <p:notesMasterId r:id="rId58"/>
   </p:notesMasterIdLst>
   <p:sldSz cx="12192000" cy="6858000"/>
   <p:notesSz cx="6858000" cy="12192000"/>
@@ -641,7 +645,7 @@
           <a:p>
             <a:r>
               <a:rPr lang="en-US" dirty="0"/>
-              <a:t>Listen carefully to this situation from real life. After break time, the school yard is full of plastic sachets, paper, bottles and food remains. The class is asked to clean the yard and decide what to do with each type of waste. Think about it, because I am going to ask you some questions.</a:t>
+              <a:t>Listen carefully to this situation from real life. After break time, the school yard is full of plastic sachets, paper, bottles and food remains. The teacher asks the class to clean the yard. Aïssatou asks: "Should we put everything in the same hole, or is there a better way to get rid of each type of waste?" Think about it, because I am going to ask you some questions.</a:t>
             </a:r>
             <a:endParaRPr lang="en-US" dirty="0"/>
           </a:p>
@@ -817,7 +821,7 @@
           <a:p>
             <a:r>
               <a:rPr lang="en-US" dirty="0"/>
-              <a:t>Good. The school yard is dirty and the waste must be managed.</a:t>
+              <a:t>Good. The class does not know how to get rid of each type of waste correctly.</a:t>
             </a:r>
             <a:endParaRPr lang="en-US" dirty="0"/>
           </a:p>
@@ -993,7 +997,7 @@
           <a:p>
             <a:r>
               <a:rPr lang="en-US" dirty="0"/>
-              <a:t>Good. Plastic sachets and food remains (also paper, bottles).</a:t>
+              <a:t>Good. Plastic sachets and food remains (also paper and bottles).</a:t>
             </a:r>
             <a:endParaRPr lang="en-US" dirty="0"/>
           </a:p>
@@ -1609,7 +1613,7 @@
           <a:p>
             <a:r>
               <a:rPr lang="en-US" dirty="0"/>
-              <a:t>Here is the question for Activity 1: What is waste? Give three sources. Take one minute to think and write your answer in your rough notebook.</a:t>
+              <a:t>Here is the question for Activity 1: Where does all this waste come from? Take one minute to think and write your answer in your rough notebook.</a:t>
             </a:r>
             <a:endParaRPr lang="en-US" dirty="0"/>
           </a:p>
@@ -1697,7 +1701,7 @@
           <a:p>
             <a:r>
               <a:rPr lang="en-US" dirty="0"/>
-              <a:t>Let us check the answer together. Waste is anything we throw away because it is no longer useful; sources are homes, markets and schools (also factories).</a:t>
+              <a:t>Let us check the answer together. From homes, markets, schools and factories.</a:t>
             </a:r>
             <a:endParaRPr lang="en-US" dirty="0"/>
           </a:p>
@@ -1785,7 +1789,7 @@
           <a:p>
             <a:r>
               <a:rPr lang="en-US" dirty="0"/>
-              <a:t>Activity 2. Look carefully at this diagram: sorting waste. Observe every detail before I ask the question.</a:t>
+              <a:t>Activity 2. Look carefully at this diagram: two groups of waste. Observe every detail before I ask the question.</a:t>
             </a:r>
             <a:endParaRPr lang="en-US" dirty="0"/>
           </a:p>
@@ -1873,7 +1877,7 @@
           <a:p>
             <a:r>
               <a:rPr lang="en-US" dirty="0"/>
-              <a:t>Here is the question for Activity 2: What is the difference between biodegradable and non-biodegradable waste? Take one minute to think and write your answer in your rough notebook.</a:t>
+              <a:t>Here is the question for Activity 2: Which of these wastes rot naturally? Take one minute to think and write your answer in your rough notebook.</a:t>
             </a:r>
             <a:endParaRPr lang="en-US" dirty="0"/>
           </a:p>
@@ -1961,7 +1965,7 @@
           <a:p>
             <a:r>
               <a:rPr lang="en-US" dirty="0"/>
-              <a:t>Let us check the answer together. Biodegradable waste rots naturally (food, leaves); non-biodegradable waste does not rot easily (plastics, glass, metals).</a:t>
+              <a:t>Let us check the answer together. Food remains, leaves and paper: they are biodegradable.</a:t>
             </a:r>
             <a:endParaRPr lang="en-US" dirty="0"/>
           </a:p>
@@ -2049,7 +2053,7 @@
           <a:p>
             <a:r>
               <a:rPr lang="en-US" dirty="0"/>
-              <a:t>Activity 3. Look carefully at this picture: litter on the ground. Observe every detail before I ask the question.</a:t>
+              <a:t>Activity 3. Look carefully at this diagram: two groups of waste. Observe every detail before I ask the question.</a:t>
             </a:r>
             <a:endParaRPr lang="en-US" dirty="0"/>
           </a:p>
@@ -2137,7 +2141,7 @@
           <a:p>
             <a:r>
               <a:rPr lang="en-US" dirty="0"/>
-              <a:t>Here is the question for Activity 3: What must we wear or use when collecting waste? Take one minute to think and write your answer in your rough notebook.</a:t>
+              <a:t>Here is the question for Activity 3: Which wastes do not rot easily? Take one minute to think and write your answer in your rough notebook.</a:t>
             </a:r>
             <a:endParaRPr lang="en-US" dirty="0"/>
           </a:p>
@@ -2225,7 +2229,7 @@
           <a:p>
             <a:r>
               <a:rPr lang="en-US" dirty="0"/>
-              <a:t>Let us check the answer together. Gloves or plastic bags and bins, and we wash our hands after.</a:t>
+              <a:t>Let us check the answer together. Plastics, glass and metals: they are non-biodegradable.</a:t>
             </a:r>
             <a:endParaRPr lang="en-US" dirty="0"/>
           </a:p>
@@ -2313,7 +2317,7 @@
           <a:p>
             <a:r>
               <a:rPr lang="en-US" dirty="0"/>
-              <a:t>Activity 4. Look carefully at this diagram: where each type of waste goes. Observe every detail before I ask the question.</a:t>
+              <a:t>Activity 4. Look carefully at this picture: litter on the ground. Observe every detail before I ask the question.</a:t>
             </a:r>
             <a:endParaRPr lang="en-US" dirty="0"/>
           </a:p>
@@ -2401,7 +2405,7 @@
           <a:p>
             <a:r>
               <a:rPr lang="en-US" dirty="0"/>
-              <a:t>Here is the question for Activity 4: Where should food remains, plastic bottles and old paper go? Take one minute to think and write your answer in your rough notebook.</a:t>
+              <a:t>Here is the question for Activity 4: What must we use when we collect waste? Take one minute to think and write your answer in your rough notebook.</a:t>
             </a:r>
             <a:endParaRPr lang="en-US" dirty="0"/>
           </a:p>
@@ -2577,7 +2581,7 @@
           <a:p>
             <a:r>
               <a:rPr lang="en-US" dirty="0"/>
-              <a:t>Let us check the answer together. Food remains to compost; plastics, glass and metals to recycling (or bury them); paper can be burnt or composted.</a:t>
+              <a:t>Let us check the answer together. Gloves or plastic bags and bins, and we wash our hands after.</a:t>
             </a:r>
             <a:endParaRPr lang="en-US" dirty="0"/>
           </a:p>
@@ -2753,7 +2757,7 @@
           <a:p>
             <a:r>
               <a:rPr lang="en-US" dirty="0"/>
-              <a:t>Here is the question for Activity 5: How is compost useful to farmers? Take one minute to think and write your answer in your rough notebook.</a:t>
+              <a:t>Here is the question for Activity 5: How can food remains help this farmer? Take one minute to think and write your answer in your rough notebook.</a:t>
             </a:r>
             <a:endParaRPr lang="en-US" dirty="0"/>
           </a:p>
@@ -2841,7 +2845,7 @@
           <a:p>
             <a:r>
               <a:rPr lang="en-US" dirty="0"/>
-              <a:t>Let us check the answer together. It is a natural manure that makes the soil fertile.</a:t>
+              <a:t>Let us check the answer together. They can be turned into compost, a natural manure that makes the soil fertile.</a:t>
             </a:r>
             <a:endParaRPr lang="en-US" dirty="0"/>
           </a:p>
@@ -3017,7 +3021,7 @@
           <a:p>
             <a:r>
               <a:rPr lang="en-US" dirty="0"/>
-              <a:t>Let us copy the definitions. The key terms of this lesson are defined as follows. On this slide we have Waste and Compost. Write each point on a new line, with the key term first, and explain it in your own words when we revise.</a:t>
+              <a:t>Let us copy the definitions. The key terms of this lesson are defined as follows. On this slide we have Waste and Biodegradable waste. Write each point on a new line, with the key term first, and explain it in your own words when we revise. When you finish, we go to the next slide.</a:t>
             </a:r>
             <a:endParaRPr lang="en-US" dirty="0"/>
           </a:p>
@@ -3105,7 +3109,7 @@
           <a:p>
             <a:r>
               <a:rPr lang="en-US" dirty="0"/>
-              <a:t>Let us copy Types and Sources of Waste. Solid waste is classified as follows. On this slide we have Biodegradable waste and Non-biodegradable waste. Write each point on a new line, with the key term first, and explain it in your own words when we revise. When you finish, we go to the next slide.</a:t>
+              <a:t>We continue with the definitions. On this slide we have Non-biodegradable waste. Write each point on a new line, with the key term first, and explain it in your own words when we revise.</a:t>
             </a:r>
             <a:endParaRPr lang="en-US" dirty="0"/>
           </a:p>
@@ -3193,7 +3197,7 @@
           <a:p>
             <a:r>
               <a:rPr lang="en-US" dirty="0"/>
-              <a:t>We continue with Types and Sources of Waste. On this slide we have Sources. Write each point on a new line, with the key term first, and explain it in your own words when we revise.</a:t>
+              <a:t>Let us copy Types of Waste. Copy the point on Biodegradable waste on the left, then draw the diagram on the right: sorting waste. Give it a title and label it clearly.</a:t>
             </a:r>
             <a:endParaRPr lang="en-US" dirty="0"/>
           </a:p>
@@ -3281,7 +3285,7 @@
           <a:p>
             <a:r>
               <a:rPr lang="en-US" dirty="0"/>
-              <a:t>Now draw this illustration in your notebook: sorting waste. Give it a title and label it clearly.</a:t>
+              <a:t>Copy the point on Non-biodegradable waste on the left, then draw the diagram on the right: plastic litter. Give it a title and label it clearly.</a:t>
             </a:r>
             <a:endParaRPr lang="en-US" dirty="0"/>
           </a:p>
@@ -3369,7 +3373,7 @@
           <a:p>
             <a:r>
               <a:rPr lang="en-US" dirty="0"/>
-              <a:t>Let us copy Managing Waste at School. We manage solid waste in the following steps. On this slide we have Collection and Sorting. Write each point on a new line, with the key term first, and explain it in your own words when we revise. When you finish, we go to the next slide.</a:t>
+              <a:t>Let us copy Sources of Waste. On this slide we have Homes, Markets and Schools. Write each point on a new line, with the key term first, and explain it in your own words when we revise. When you finish, we go to the next slide.</a:t>
             </a:r>
             <a:endParaRPr lang="en-US" dirty="0"/>
           </a:p>
@@ -3545,7 +3549,7 @@
           <a:p>
             <a:r>
               <a:rPr lang="en-US" dirty="0"/>
-              <a:t>We continue with Managing Waste at School. On this slide we have Disposal. Write each point on a new line, with the key term first, and explain it in your own words when we revise.</a:t>
+              <a:t>We continue with Sources of Waste. On this slide we have Factories and workshops. Write each point on a new line, with the key term first, and explain it in your own words when we revise.</a:t>
             </a:r>
             <a:endParaRPr lang="en-US" dirty="0"/>
           </a:p>
@@ -3633,7 +3637,7 @@
           <a:p>
             <a:r>
               <a:rPr lang="en-US" dirty="0"/>
-              <a:t>Now let us check what you have understood. Question 1: Give two examples of biodegradable and two of non-biodegradable waste. Answer in your exercise book.</a:t>
+              <a:t>Let us copy Managing Waste at School. We manage solid waste in the following steps. Copy the point on Collection on the left, then draw the diagram on the right: waste to collect. Give it a title and label it clearly.</a:t>
             </a:r>
             <a:endParaRPr lang="en-US" dirty="0"/>
           </a:p>
@@ -3721,7 +3725,7 @@
           <a:p>
             <a:r>
               <a:rPr lang="en-US" dirty="0"/>
-              <a:t>The expected answer is: biodegradable: food remains, leaves. Non-biodegradable: plastic bottles, glass. If you got it right, well done.</a:t>
+              <a:t>Copy the point on Sorting on the left, then draw the diagram on the right: sorting waste. Give it a title and label it clearly.</a:t>
             </a:r>
             <a:endParaRPr lang="en-US" dirty="0"/>
           </a:p>
@@ -3809,7 +3813,7 @@
           <a:p>
             <a:r>
               <a:rPr lang="en-US" dirty="0"/>
-              <a:t>Now let us check what you have understood. Question 2: What is compost used for? Answer in your exercise book.</a:t>
+              <a:t>Copy the point on Disposal site 1 (compost) on the left, then draw the diagram on the right: compost is used on farms. Give it a title and label it clearly.</a:t>
             </a:r>
             <a:endParaRPr lang="en-US" dirty="0"/>
           </a:p>
@@ -3897,7 +3901,7 @@
           <a:p>
             <a:r>
               <a:rPr lang="en-US" dirty="0"/>
-              <a:t>The expected answer is: to make the soil fertile. If you got it right, well done.</a:t>
+              <a:t>We continue with Managing Waste at School. On this slide we have Disposal site 2 (burning) and Disposal site 3 (recycling or burying). Write each point on a new line, with the key term first, and explain it in your own words when we revise.</a:t>
             </a:r>
             <a:endParaRPr lang="en-US" dirty="0"/>
           </a:p>
@@ -3985,7 +3989,7 @@
           <a:p>
             <a:r>
               <a:rPr lang="en-US" dirty="0"/>
-              <a:t>For those who need more practice, fill in the blanks in your exercise book. The answers are: number 1, biodegradable; number 2, non-biodegradable; number 3, compost.</a:t>
+              <a:t>Now let us check what you have understood. Question 1: Give two examples of biodegradable and two of non-biodegradable waste. Answer in your exercise book.</a:t>
             </a:r>
             <a:endParaRPr lang="en-US" dirty="0"/>
           </a:p>
@@ -4073,7 +4077,7 @@
           <a:p>
             <a:r>
               <a:rPr lang="en-US" dirty="0"/>
-              <a:t>For your homework: At home, sort the waste of one day into two groups and write what you found in each group. We shall correct it at the beginning of our next lesson.</a:t>
+              <a:t>The expected answer is: biodegradable: food remains, leaves. Non-biodegradable: plastic bottles, glass. If you got it right, well done.</a:t>
             </a:r>
             <a:endParaRPr lang="en-US" dirty="0"/>
           </a:p>
@@ -4161,7 +4165,7 @@
           <a:p>
             <a:r>
               <a:rPr lang="en-US" dirty="0"/>
-              <a:t>Our next lesson will be on Lesson 7: The Atmosphere. Thank you for your attention, and see you next time.</a:t>
+              <a:t>Now let us check what you have understood. Question 2: What is compost used for? Answer in your exercise book.</a:t>
             </a:r>
             <a:endParaRPr lang="en-US" dirty="0"/>
           </a:p>
@@ -4249,7 +4253,7 @@
           <a:p>
             <a:r>
               <a:rPr lang="en-US" dirty="0"/>
-              <a:t>Let us play the bilingual game. I say a word in English, and you give me the French word. Then we do the reverse.</a:t>
+              <a:t>The expected answer is: to make the soil fertile. If you got it right, well done.</a:t>
             </a:r>
             <a:endParaRPr lang="en-US" dirty="0"/>
           </a:p>
@@ -4337,7 +4341,7 @@
           <a:p>
             <a:r>
               <a:rPr lang="en-US" dirty="0"/>
-              <a:t>I record this information in the official logbook of the class after the lesson.</a:t>
+              <a:t>For those who need more practice, fill in the blanks in your exercise book. The answers are: number 1, biodegradable; number 2, non-biodegradable; number 3, compost.</a:t>
             </a:r>
             <a:endParaRPr lang="en-US" dirty="0"/>
           </a:p>
@@ -4513,7 +4517,7 @@
           <a:p>
             <a:r>
               <a:rPr lang="en-US" dirty="0"/>
-              <a:t>I complete the second page of the logbook: the matter taught, the evaluation, the homework and the attendance.</a:t>
+              <a:t>For your homework: At home, sort the waste of one day into two groups and write what you found in each group. We shall correct it at the beginning of our next lesson.</a:t>
             </a:r>
             <a:endParaRPr lang="en-US" dirty="0"/>
           </a:p>
@@ -4601,7 +4605,7 @@
           <a:p>
             <a:r>
               <a:rPr lang="en-US" dirty="0"/>
-              <a:t>This slide is for me, the teacher: it gives the timing of the lesson and what to do if the projector is not available.</a:t>
+              <a:t>Our next lesson will be on Lesson 7: The Atmosphere. Thank you for your attention, and see you next time.</a:t>
             </a:r>
             <a:endParaRPr lang="en-US" dirty="0"/>
           </a:p>
@@ -4689,7 +4693,7 @@
           <a:p>
             <a:r>
               <a:rPr lang="en-US" dirty="0"/>
-              <a:t>These are the references and picture credits used to prepare this lesson.</a:t>
+              <a:t>Let us play the bilingual game. I say a word in English, and you give me the French word. Then we do the reverse.</a:t>
             </a:r>
             <a:endParaRPr lang="en-US" dirty="0"/>
           </a:p>
@@ -4713,6 +4717,358 @@
             <a:fld id="{F7021451-1387-4CA6-816F-3879F97B5CBC}" type="slidenum">
               <a:rPr lang="en-US"/>
               <a:t>52</a:t>
+            </a:fld>
+            <a:endParaRPr lang="en-US"/>
+          </a:p>
+        </p:txBody>
+      </p:sp>
+    </p:spTree>
+    <p:extLst>
+      <p:ext uri="{BB962C8B-B14F-4D97-AF65-F5344CB8AC3E}">
+        <p14:creationId xmlns:p14="http://schemas.microsoft.com/office/powerpoint/2010/main" val="1024086991"/>
+      </p:ext>
+    </p:extLst>
+  </p:cSld>
+  <p:clrMapOvr>
+    <a:masterClrMapping/>
+  </p:clrMapOvr>
+</p:notes>
+</file>
+
+<file path=ppt/notesSlides/notesSlide53.xml><?xml version="1.0" encoding="utf-8"?>
+<p:notes xmlns:a="http://schemas.openxmlformats.org/drawingml/2006/main" xmlns:r="http://schemas.openxmlformats.org/officeDocument/2006/relationships" xmlns:p="http://schemas.openxmlformats.org/presentationml/2006/main">
+  <p:cSld>
+    <p:spTree>
+      <p:nvGrpSpPr>
+        <p:cNvPr id="1" name=""/>
+        <p:cNvGrpSpPr/>
+        <p:nvPr/>
+      </p:nvGrpSpPr>
+      <p:grpSpPr>
+        <a:xfrm>
+          <a:off x="0" y="0"/>
+          <a:ext cx="0" cy="0"/>
+          <a:chOff x="0" y="0"/>
+          <a:chExt cx="0" cy="0"/>
+        </a:xfrm>
+      </p:grpSpPr>
+      <p:sp>
+        <p:nvSpPr>
+          <p:cNvPr id="2" name="Slide Image Placeholder 1"/>
+          <p:cNvSpPr>
+            <a:spLocks noGrp="1" noRot="1" noChangeAspect="1"/>
+          </p:cNvSpPr>
+          <p:nvPr>
+            <p:ph type="sldImg"/>
+          </p:nvPr>
+        </p:nvSpPr>
+        <p:spPr/>
+      </p:sp>
+      <p:sp>
+        <p:nvSpPr>
+          <p:cNvPr id="3" name="Notes Placeholder 2"/>
+          <p:cNvSpPr>
+            <a:spLocks noGrp="1"/>
+          </p:cNvSpPr>
+          <p:nvPr>
+            <p:ph type="body" idx="1"/>
+          </p:nvPr>
+        </p:nvSpPr>
+        <p:spPr/>
+        <p:txBody>
+          <a:bodyPr/>
+          <a:lstStyle/>
+          <a:p>
+            <a:r>
+              <a:rPr lang="en-US" dirty="0"/>
+              <a:t>I record this information in the official logbook of the class after the lesson.</a:t>
+            </a:r>
+            <a:endParaRPr lang="en-US" dirty="0"/>
+          </a:p>
+        </p:txBody>
+      </p:sp>
+      <p:sp>
+        <p:nvSpPr>
+          <p:cNvPr id="4" name="Slide Number Placeholder 3"/>
+          <p:cNvSpPr>
+            <a:spLocks noGrp="1"/>
+          </p:cNvSpPr>
+          <p:nvPr>
+            <p:ph type="sldNum" sz="quarter" idx="10"/>
+          </p:nvPr>
+        </p:nvSpPr>
+        <p:spPr/>
+        <p:txBody>
+          <a:bodyPr/>
+          <a:lstStyle/>
+          <a:p>
+            <a:fld id="{F7021451-1387-4CA6-816F-3879F97B5CBC}" type="slidenum">
+              <a:rPr lang="en-US"/>
+              <a:t>53</a:t>
+            </a:fld>
+            <a:endParaRPr lang="en-US"/>
+          </a:p>
+        </p:txBody>
+      </p:sp>
+    </p:spTree>
+    <p:extLst>
+      <p:ext uri="{BB962C8B-B14F-4D97-AF65-F5344CB8AC3E}">
+        <p14:creationId xmlns:p14="http://schemas.microsoft.com/office/powerpoint/2010/main" val="1024086991"/>
+      </p:ext>
+    </p:extLst>
+  </p:cSld>
+  <p:clrMapOvr>
+    <a:masterClrMapping/>
+  </p:clrMapOvr>
+</p:notes>
+</file>
+
+<file path=ppt/notesSlides/notesSlide54.xml><?xml version="1.0" encoding="utf-8"?>
+<p:notes xmlns:a="http://schemas.openxmlformats.org/drawingml/2006/main" xmlns:r="http://schemas.openxmlformats.org/officeDocument/2006/relationships" xmlns:p="http://schemas.openxmlformats.org/presentationml/2006/main">
+  <p:cSld>
+    <p:spTree>
+      <p:nvGrpSpPr>
+        <p:cNvPr id="1" name=""/>
+        <p:cNvGrpSpPr/>
+        <p:nvPr/>
+      </p:nvGrpSpPr>
+      <p:grpSpPr>
+        <a:xfrm>
+          <a:off x="0" y="0"/>
+          <a:ext cx="0" cy="0"/>
+          <a:chOff x="0" y="0"/>
+          <a:chExt cx="0" cy="0"/>
+        </a:xfrm>
+      </p:grpSpPr>
+      <p:sp>
+        <p:nvSpPr>
+          <p:cNvPr id="2" name="Slide Image Placeholder 1"/>
+          <p:cNvSpPr>
+            <a:spLocks noGrp="1" noRot="1" noChangeAspect="1"/>
+          </p:cNvSpPr>
+          <p:nvPr>
+            <p:ph type="sldImg"/>
+          </p:nvPr>
+        </p:nvSpPr>
+        <p:spPr/>
+      </p:sp>
+      <p:sp>
+        <p:nvSpPr>
+          <p:cNvPr id="3" name="Notes Placeholder 2"/>
+          <p:cNvSpPr>
+            <a:spLocks noGrp="1"/>
+          </p:cNvSpPr>
+          <p:nvPr>
+            <p:ph type="body" idx="1"/>
+          </p:nvPr>
+        </p:nvSpPr>
+        <p:spPr/>
+        <p:txBody>
+          <a:bodyPr/>
+          <a:lstStyle/>
+          <a:p>
+            <a:r>
+              <a:rPr lang="en-US" dirty="0"/>
+              <a:t>I complete the second page of the logbook: the matter taught, the evaluation, the homework and the attendance.</a:t>
+            </a:r>
+            <a:endParaRPr lang="en-US" dirty="0"/>
+          </a:p>
+        </p:txBody>
+      </p:sp>
+      <p:sp>
+        <p:nvSpPr>
+          <p:cNvPr id="4" name="Slide Number Placeholder 3"/>
+          <p:cNvSpPr>
+            <a:spLocks noGrp="1"/>
+          </p:cNvSpPr>
+          <p:nvPr>
+            <p:ph type="sldNum" sz="quarter" idx="10"/>
+          </p:nvPr>
+        </p:nvSpPr>
+        <p:spPr/>
+        <p:txBody>
+          <a:bodyPr/>
+          <a:lstStyle/>
+          <a:p>
+            <a:fld id="{F7021451-1387-4CA6-816F-3879F97B5CBC}" type="slidenum">
+              <a:rPr lang="en-US"/>
+              <a:t>54</a:t>
+            </a:fld>
+            <a:endParaRPr lang="en-US"/>
+          </a:p>
+        </p:txBody>
+      </p:sp>
+    </p:spTree>
+    <p:extLst>
+      <p:ext uri="{BB962C8B-B14F-4D97-AF65-F5344CB8AC3E}">
+        <p14:creationId xmlns:p14="http://schemas.microsoft.com/office/powerpoint/2010/main" val="1024086991"/>
+      </p:ext>
+    </p:extLst>
+  </p:cSld>
+  <p:clrMapOvr>
+    <a:masterClrMapping/>
+  </p:clrMapOvr>
+</p:notes>
+</file>
+
+<file path=ppt/notesSlides/notesSlide55.xml><?xml version="1.0" encoding="utf-8"?>
+<p:notes xmlns:a="http://schemas.openxmlformats.org/drawingml/2006/main" xmlns:r="http://schemas.openxmlformats.org/officeDocument/2006/relationships" xmlns:p="http://schemas.openxmlformats.org/presentationml/2006/main">
+  <p:cSld>
+    <p:spTree>
+      <p:nvGrpSpPr>
+        <p:cNvPr id="1" name=""/>
+        <p:cNvGrpSpPr/>
+        <p:nvPr/>
+      </p:nvGrpSpPr>
+      <p:grpSpPr>
+        <a:xfrm>
+          <a:off x="0" y="0"/>
+          <a:ext cx="0" cy="0"/>
+          <a:chOff x="0" y="0"/>
+          <a:chExt cx="0" cy="0"/>
+        </a:xfrm>
+      </p:grpSpPr>
+      <p:sp>
+        <p:nvSpPr>
+          <p:cNvPr id="2" name="Slide Image Placeholder 1"/>
+          <p:cNvSpPr>
+            <a:spLocks noGrp="1" noRot="1" noChangeAspect="1"/>
+          </p:cNvSpPr>
+          <p:nvPr>
+            <p:ph type="sldImg"/>
+          </p:nvPr>
+        </p:nvSpPr>
+        <p:spPr/>
+      </p:sp>
+      <p:sp>
+        <p:nvSpPr>
+          <p:cNvPr id="3" name="Notes Placeholder 2"/>
+          <p:cNvSpPr>
+            <a:spLocks noGrp="1"/>
+          </p:cNvSpPr>
+          <p:nvPr>
+            <p:ph type="body" idx="1"/>
+          </p:nvPr>
+        </p:nvSpPr>
+        <p:spPr/>
+        <p:txBody>
+          <a:bodyPr/>
+          <a:lstStyle/>
+          <a:p>
+            <a:r>
+              <a:rPr lang="en-US" dirty="0"/>
+              <a:t>This slide is for me, the teacher: it gives the timing of the lesson and what to do if the projector is not available.</a:t>
+            </a:r>
+            <a:endParaRPr lang="en-US" dirty="0"/>
+          </a:p>
+        </p:txBody>
+      </p:sp>
+      <p:sp>
+        <p:nvSpPr>
+          <p:cNvPr id="4" name="Slide Number Placeholder 3"/>
+          <p:cNvSpPr>
+            <a:spLocks noGrp="1"/>
+          </p:cNvSpPr>
+          <p:nvPr>
+            <p:ph type="sldNum" sz="quarter" idx="10"/>
+          </p:nvPr>
+        </p:nvSpPr>
+        <p:spPr/>
+        <p:txBody>
+          <a:bodyPr/>
+          <a:lstStyle/>
+          <a:p>
+            <a:fld id="{F7021451-1387-4CA6-816F-3879F97B5CBC}" type="slidenum">
+              <a:rPr lang="en-US"/>
+              <a:t>55</a:t>
+            </a:fld>
+            <a:endParaRPr lang="en-US"/>
+          </a:p>
+        </p:txBody>
+      </p:sp>
+    </p:spTree>
+    <p:extLst>
+      <p:ext uri="{BB962C8B-B14F-4D97-AF65-F5344CB8AC3E}">
+        <p14:creationId xmlns:p14="http://schemas.microsoft.com/office/powerpoint/2010/main" val="1024086991"/>
+      </p:ext>
+    </p:extLst>
+  </p:cSld>
+  <p:clrMapOvr>
+    <a:masterClrMapping/>
+  </p:clrMapOvr>
+</p:notes>
+</file>
+
+<file path=ppt/notesSlides/notesSlide56.xml><?xml version="1.0" encoding="utf-8"?>
+<p:notes xmlns:a="http://schemas.openxmlformats.org/drawingml/2006/main" xmlns:r="http://schemas.openxmlformats.org/officeDocument/2006/relationships" xmlns:p="http://schemas.openxmlformats.org/presentationml/2006/main">
+  <p:cSld>
+    <p:spTree>
+      <p:nvGrpSpPr>
+        <p:cNvPr id="1" name=""/>
+        <p:cNvGrpSpPr/>
+        <p:nvPr/>
+      </p:nvGrpSpPr>
+      <p:grpSpPr>
+        <a:xfrm>
+          <a:off x="0" y="0"/>
+          <a:ext cx="0" cy="0"/>
+          <a:chOff x="0" y="0"/>
+          <a:chExt cx="0" cy="0"/>
+        </a:xfrm>
+      </p:grpSpPr>
+      <p:sp>
+        <p:nvSpPr>
+          <p:cNvPr id="2" name="Slide Image Placeholder 1"/>
+          <p:cNvSpPr>
+            <a:spLocks noGrp="1" noRot="1" noChangeAspect="1"/>
+          </p:cNvSpPr>
+          <p:nvPr>
+            <p:ph type="sldImg"/>
+          </p:nvPr>
+        </p:nvSpPr>
+        <p:spPr/>
+      </p:sp>
+      <p:sp>
+        <p:nvSpPr>
+          <p:cNvPr id="3" name="Notes Placeholder 2"/>
+          <p:cNvSpPr>
+            <a:spLocks noGrp="1"/>
+          </p:cNvSpPr>
+          <p:nvPr>
+            <p:ph type="body" idx="1"/>
+          </p:nvPr>
+        </p:nvSpPr>
+        <p:spPr/>
+        <p:txBody>
+          <a:bodyPr/>
+          <a:lstStyle/>
+          <a:p>
+            <a:r>
+              <a:rPr lang="en-US" dirty="0"/>
+              <a:t>These are the references and picture credits used to prepare this lesson.</a:t>
+            </a:r>
+            <a:endParaRPr lang="en-US" dirty="0"/>
+          </a:p>
+        </p:txBody>
+      </p:sp>
+      <p:sp>
+        <p:nvSpPr>
+          <p:cNvPr id="4" name="Slide Number Placeholder 3"/>
+          <p:cNvSpPr>
+            <a:spLocks noGrp="1"/>
+          </p:cNvSpPr>
+          <p:nvPr>
+            <p:ph type="sldNum" sz="quarter" idx="10"/>
+          </p:nvPr>
+        </p:nvSpPr>
+        <p:spPr/>
+        <p:txBody>
+          <a:bodyPr/>
+          <a:lstStyle/>
+          <a:p>
+            <a:fld id="{F7021451-1387-4CA6-816F-3879F97B5CBC}" type="slidenum">
+              <a:rPr lang="en-US"/>
+              <a:t>56</a:t>
             </a:fld>
             <a:endParaRPr lang="en-US"/>
           </a:p>
@@ -4953,7 +5309,7 @@
           <a:p>
             <a:r>
               <a:rPr lang="en-US" dirty="0"/>
-              <a:t>By the end of this lesson, you should be able to do three things. Number 1: define waste and give its types and sources. Number 2: sort waste into biodegradable and non-biodegradable. Number 3: dispose of each type of waste correctly.</a:t>
+              <a:t>By the end of this lesson, you should be able to do three things. Number 1: define waste and give its types and sources. Number 2: sort waste into biodegradable and non-biodegradable. Number 3: dispose of each type of waste at the right site.</a:t>
             </a:r>
             <a:endParaRPr lang="en-US" dirty="0"/>
           </a:p>
@@ -6421,7 +6777,7 @@
         <p:spPr>
           <a:xfrm>
             <a:off x="0" y="658368"/>
-            <a:ext cx="5120640" cy="5833872"/>
+            <a:ext cx="2468880" cy="5833872"/>
           </a:xfrm>
           <a:prstGeom prst="rect">
             <a:avLst/>
@@ -6436,8 +6792,8 @@
         </p:nvSpPr>
         <p:spPr>
           <a:xfrm>
-            <a:off x="5349240" y="1005840"/>
-            <a:ext cx="6522415" cy="731520"/>
+            <a:off x="2697480" y="1005840"/>
+            <a:ext cx="9174175" cy="731520"/>
           </a:xfrm>
           <a:prstGeom prst="rect">
             <a:avLst/>
@@ -6477,8 +6833,8 @@
         </p:nvSpPr>
         <p:spPr>
           <a:xfrm>
-            <a:off x="5349240" y="1783080"/>
-            <a:ext cx="6522415" cy="4663440"/>
+            <a:off x="2697480" y="1783080"/>
+            <a:ext cx="9174175" cy="4663440"/>
           </a:xfrm>
           <a:prstGeom prst="rect">
             <a:avLst/>
@@ -6505,7 +6861,7 @@
                 <a:ea typeface="Times New Roman" pitchFamily="34" charset="-122"/>
                 <a:cs typeface="Times New Roman" pitchFamily="34" charset="-120"/>
               </a:rPr>
-              <a:t>After break time, the school yard is full of plastic sachets, paper, bottles and food remains. The class is asked to clean the yard and decide what to do with each type of waste.</a:t>
+              <a:t>After break time, the school yard is full of plastic sachets, paper, bottles and food remains. The teacher asks the class to clean the yard. Aïssatou asks: "Should we put everything in the same hole, or is there a better way to get rid of each type of waste?"</a:t>
             </a:r>
             <a:endParaRPr lang="en-US" sz="4000" dirty="0"/>
           </a:p>
@@ -6943,7 +7299,7 @@
                 <a:ea typeface="Times New Roman" pitchFamily="34" charset="-122"/>
                 <a:cs typeface="Times New Roman" pitchFamily="34" charset="-120"/>
               </a:rPr>
-              <a:t>The school yard is dirty and the waste must be managed.</a:t>
+              <a:t>The class does not know how to get rid of each type of waste correctly.</a:t>
             </a:r>
             <a:endParaRPr lang="en-US" sz="4000" dirty="0"/>
           </a:p>
@@ -7381,7 +7737,7 @@
                 <a:ea typeface="Times New Roman" pitchFamily="34" charset="-122"/>
                 <a:cs typeface="Times New Roman" pitchFamily="34" charset="-120"/>
               </a:rPr>
-              <a:t>Plastic sachets and food remains (also paper, bottles).</a:t>
+              <a:t>Plastic sachets and food remains (also paper and bottles).</a:t>
             </a:r>
             <a:endParaRPr lang="en-US" sz="4000" dirty="0"/>
           </a:p>
@@ -9285,7 +9641,7 @@
                 <a:ea typeface="Times New Roman" pitchFamily="34" charset="-122"/>
                 <a:cs typeface="Times New Roman" pitchFamily="34" charset="-120"/>
               </a:rPr>
-              <a:t>What is waste? Give three sources.</a:t>
+              <a:t>Where does all this waste come from?</a:t>
             </a:r>
             <a:endParaRPr lang="en-US" sz="4000" dirty="0"/>
           </a:p>
@@ -9504,7 +9860,7 @@
                 <a:ea typeface="Times New Roman" pitchFamily="34" charset="-122"/>
                 <a:cs typeface="Times New Roman" pitchFamily="34" charset="-120"/>
               </a:rPr>
-              <a:t>Waste is anything we throw away because it is no longer useful; sources are homes, markets and schools (also factories).</a:t>
+              <a:t>From homes, markets, schools and factories.</a:t>
             </a:r>
             <a:endParaRPr lang="en-US" sz="4000" dirty="0"/>
           </a:p>
@@ -9718,7 +10074,7 @@
                 <a:ea typeface="Times New Roman" pitchFamily="34" charset="-122"/>
                 <a:cs typeface="Times New Roman" pitchFamily="34" charset="-120"/>
               </a:rPr>
-              <a:t>Sorting waste.</a:t>
+              <a:t>Two groups of waste.</a:t>
             </a:r>
             <a:endParaRPr lang="en-US" sz="1800" dirty="0"/>
           </a:p>
@@ -9937,7 +10293,7 @@
                 <a:ea typeface="Times New Roman" pitchFamily="34" charset="-122"/>
                 <a:cs typeface="Times New Roman" pitchFamily="34" charset="-120"/>
               </a:rPr>
-              <a:t>What is the difference between biodegradable and non-biodegradable waste?</a:t>
+              <a:t>Which of these wastes rot naturally?</a:t>
             </a:r>
             <a:endParaRPr lang="en-US" sz="4000" dirty="0"/>
           </a:p>
@@ -10156,7 +10512,7 @@
                 <a:ea typeface="Times New Roman" pitchFamily="34" charset="-122"/>
                 <a:cs typeface="Times New Roman" pitchFamily="34" charset="-120"/>
               </a:rPr>
-              <a:t>Biodegradable waste rots naturally (food, leaves); non-biodegradable waste does not rot easily (plastics, glass, metals).</a:t>
+              <a:t>Food remains, leaves and paper: they are biodegradable.</a:t>
             </a:r>
             <a:endParaRPr lang="en-US" sz="4000" dirty="0"/>
           </a:p>
@@ -10268,7 +10624,7 @@
                 <a:ea typeface="Calibri" pitchFamily="34" charset="-122"/>
                 <a:cs typeface="Calibri" pitchFamily="34" charset="-120"/>
               </a:rPr>
-              <a:t>3. COLLECTION</a:t>
+              <a:t>2. TYPES OF WASTE</a:t>
             </a:r>
             <a:endParaRPr lang="en-US" sz="1400" dirty="0"/>
           </a:p>
@@ -10315,7 +10671,7 @@
       </p:sp>
       <p:pic>
         <p:nvPicPr>
-          <p:cNvPr id="4" name="Image 0" descr="/home/claude/f4/img/v2/usa_litter.jpg">    </p:cNvPr>
+          <p:cNvPr id="4" name="Image 0" descr="/home/claude/f4/img/v2/waste_sort_big.png">    </p:cNvPr>
           <p:cNvPicPr>
             <a:picLocks noChangeAspect="1"/>
           </p:cNvPicPr>
@@ -10329,8 +10685,8 @@
         </p:blipFill>
         <p:spPr>
           <a:xfrm>
-            <a:off x="2246610" y="1783080"/>
-            <a:ext cx="7698475" cy="4270248"/>
+            <a:off x="629930" y="1783080"/>
+            <a:ext cx="10931835" cy="4270248"/>
           </a:xfrm>
           <a:prstGeom prst="rect">
             <a:avLst/>
@@ -10370,7 +10726,7 @@
                 <a:ea typeface="Times New Roman" pitchFamily="34" charset="-122"/>
                 <a:cs typeface="Times New Roman" pitchFamily="34" charset="-120"/>
               </a:rPr>
-              <a:t>Litter on the ground.</a:t>
+              <a:t>Two groups of waste.</a:t>
             </a:r>
             <a:endParaRPr lang="en-US" sz="1800" dirty="0"/>
           </a:p>
@@ -10482,7 +10838,7 @@
                 <a:ea typeface="Calibri" pitchFamily="34" charset="-122"/>
                 <a:cs typeface="Calibri" pitchFamily="34" charset="-120"/>
               </a:rPr>
-              <a:t>3. COLLECTION</a:t>
+              <a:t>2. TYPES OF WASTE</a:t>
             </a:r>
             <a:endParaRPr lang="en-US" sz="1400" dirty="0"/>
           </a:p>
@@ -10589,7 +10945,7 @@
                 <a:ea typeface="Times New Roman" pitchFamily="34" charset="-122"/>
                 <a:cs typeface="Times New Roman" pitchFamily="34" charset="-120"/>
               </a:rPr>
-              <a:t>What must we wear or use when collecting waste?</a:t>
+              <a:t>Which wastes do not rot easily?</a:t>
             </a:r>
             <a:endParaRPr lang="en-US" sz="4000" dirty="0"/>
           </a:p>
@@ -10701,7 +11057,7 @@
                 <a:ea typeface="Calibri" pitchFamily="34" charset="-122"/>
                 <a:cs typeface="Calibri" pitchFamily="34" charset="-120"/>
               </a:rPr>
-              <a:t>3. COLLECTION</a:t>
+              <a:t>2. TYPES OF WASTE</a:t>
             </a:r>
             <a:endParaRPr lang="en-US" sz="1400" dirty="0"/>
           </a:p>
@@ -10808,7 +11164,7 @@
                 <a:ea typeface="Times New Roman" pitchFamily="34" charset="-122"/>
                 <a:cs typeface="Times New Roman" pitchFamily="34" charset="-120"/>
               </a:rPr>
-              <a:t>Gloves or plastic bags and bins, and we wash our hands after.</a:t>
+              <a:t>Plastics, glass and metals: they are non-biodegradable.</a:t>
             </a:r>
             <a:endParaRPr lang="en-US" sz="4000" dirty="0"/>
           </a:p>
@@ -10920,7 +11276,7 @@
                 <a:ea typeface="Calibri" pitchFamily="34" charset="-122"/>
                 <a:cs typeface="Calibri" pitchFamily="34" charset="-120"/>
               </a:rPr>
-              <a:t>4. DISPOSAL</a:t>
+              <a:t>3. COLLECTION</a:t>
             </a:r>
             <a:endParaRPr lang="en-US" sz="1400" dirty="0"/>
           </a:p>
@@ -10967,7 +11323,7 @@
       </p:sp>
       <p:pic>
         <p:nvPicPr>
-          <p:cNvPr id="4" name="Image 0" descr="/home/claude/f4/img/v2/waste_sort_big.png">    </p:cNvPr>
+          <p:cNvPr id="4" name="Image 0" descr="/home/claude/f4/img/v2/usa_litter.jpg">    </p:cNvPr>
           <p:cNvPicPr>
             <a:picLocks noChangeAspect="1"/>
           </p:cNvPicPr>
@@ -10981,8 +11337,8 @@
         </p:blipFill>
         <p:spPr>
           <a:xfrm>
-            <a:off x="629930" y="1783080"/>
-            <a:ext cx="10931835" cy="4270248"/>
+            <a:off x="2246610" y="1783080"/>
+            <a:ext cx="7698475" cy="4270248"/>
           </a:xfrm>
           <a:prstGeom prst="rect">
             <a:avLst/>
@@ -11022,7 +11378,7 @@
                 <a:ea typeface="Times New Roman" pitchFamily="34" charset="-122"/>
                 <a:cs typeface="Times New Roman" pitchFamily="34" charset="-120"/>
               </a:rPr>
-              <a:t>Where each type of waste goes.</a:t>
+              <a:t>Litter on the ground.</a:t>
             </a:r>
             <a:endParaRPr lang="en-US" sz="1800" dirty="0"/>
           </a:p>
@@ -11134,7 +11490,7 @@
                 <a:ea typeface="Calibri" pitchFamily="34" charset="-122"/>
                 <a:cs typeface="Calibri" pitchFamily="34" charset="-120"/>
               </a:rPr>
-              <a:t>4. DISPOSAL</a:t>
+              <a:t>3. COLLECTION</a:t>
             </a:r>
             <a:endParaRPr lang="en-US" sz="1400" dirty="0"/>
           </a:p>
@@ -11241,7 +11597,7 @@
                 <a:ea typeface="Times New Roman" pitchFamily="34" charset="-122"/>
                 <a:cs typeface="Times New Roman" pitchFamily="34" charset="-120"/>
               </a:rPr>
-              <a:t>Where should food remains, plastic bottles and old paper go?</a:t>
+              <a:t>What must we use when we collect waste?</a:t>
             </a:r>
             <a:endParaRPr lang="en-US" sz="4000" dirty="0"/>
           </a:p>
@@ -12062,7 +12418,7 @@
                           <a:ea typeface="Calibri" pitchFamily="34" charset="-122"/>
                           <a:cs typeface="Calibri" pitchFamily="34" charset="-120"/>
                         </a:rPr>
-                        <a:t>Definition, types and sources of waste; collecting waste on the school campus; sorting into biodegradable and non-biodegradable; disposal at the right sites.</a:t>
+                        <a:t>Theoretical basis: recall and define waste, types and sources. Practical exercise (within the school environment): collect waste around the school campus; sort it into biodegradable and non-biodegradable; dispose of it at the indicated sites (compost; burning of papers; recycling or burying of plastics, glass and metals).</a:t>
                       </a:r>
                       <a:endParaRPr lang="en-US" sz="1700" dirty="0">
                         <a:latin typeface="Calibri" charset="0"/>
@@ -12362,7 +12718,7 @@
                 <a:ea typeface="Calibri" pitchFamily="34" charset="-122"/>
                 <a:cs typeface="Calibri" pitchFamily="34" charset="-120"/>
               </a:rPr>
-              <a:t>4. DISPOSAL</a:t>
+              <a:t>3. COLLECTION</a:t>
             </a:r>
             <a:endParaRPr lang="en-US" sz="1400" dirty="0"/>
           </a:p>
@@ -12469,7 +12825,7 @@
                 <a:ea typeface="Times New Roman" pitchFamily="34" charset="-122"/>
                 <a:cs typeface="Times New Roman" pitchFamily="34" charset="-120"/>
               </a:rPr>
-              <a:t>Food remains to compost; plastics, glass and metals to recycling (or bury them); paper can be burnt or composted.</a:t>
+              <a:t>Gloves or plastic bags and bins, and we wash our hands after.</a:t>
             </a:r>
             <a:endParaRPr lang="en-US" sz="4000" dirty="0"/>
           </a:p>
@@ -12902,7 +13258,7 @@
                 <a:ea typeface="Times New Roman" pitchFamily="34" charset="-122"/>
                 <a:cs typeface="Times New Roman" pitchFamily="34" charset="-120"/>
               </a:rPr>
-              <a:t>How is compost useful to farmers?</a:t>
+              <a:t>How can food remains help this farmer?</a:t>
             </a:r>
             <a:endParaRPr lang="en-US" sz="4000" dirty="0"/>
           </a:p>
@@ -13121,7 +13477,7 @@
                 <a:ea typeface="Times New Roman" pitchFamily="34" charset="-122"/>
                 <a:cs typeface="Times New Roman" pitchFamily="34" charset="-120"/>
               </a:rPr>
-              <a:t>It is a natural manure that makes the soil fertile.</a:t>
+              <a:t>They can be turned into compost, a natural manure that makes the soil fertile.</a:t>
             </a:r>
             <a:endParaRPr lang="en-US" sz="4000" dirty="0"/>
           </a:p>
@@ -13515,7 +13871,7 @@
         <p:spPr>
           <a:xfrm>
             <a:off x="0" y="658368"/>
-            <a:ext cx="3840480" cy="5833872"/>
+            <a:ext cx="5120640" cy="5833872"/>
           </a:xfrm>
           <a:prstGeom prst="rect">
             <a:avLst/>
@@ -13530,8 +13886,8 @@
         </p:nvSpPr>
         <p:spPr>
           <a:xfrm>
-            <a:off x="4069080" y="1005840"/>
-            <a:ext cx="7802575" cy="731520"/>
+            <a:off x="5349240" y="1005840"/>
+            <a:ext cx="6522415" cy="731520"/>
           </a:xfrm>
           <a:prstGeom prst="rect">
             <a:avLst/>
@@ -13571,8 +13927,8 @@
         </p:nvSpPr>
         <p:spPr>
           <a:xfrm>
-            <a:off x="4069080" y="1783080"/>
-            <a:ext cx="7802575" cy="4663440"/>
+            <a:off x="5349240" y="1783080"/>
+            <a:ext cx="6522415" cy="4663440"/>
           </a:xfrm>
           <a:prstGeom prst="rect">
             <a:avLst/>
@@ -13656,7 +14012,7 @@
                 <a:ea typeface="Times New Roman" pitchFamily="34" charset="-122"/>
                 <a:cs typeface="Times New Roman" pitchFamily="34" charset="-120"/>
               </a:rPr>
-              <a:t>Compost: </a:t>
+              <a:t>Biodegradable waste: </a:t>
             </a:r>
             <a:pPr algn="l" indent="0" marL="0">
               <a:spcAft>
@@ -13673,7 +14029,7 @@
                 <a:ea typeface="Times New Roman" pitchFamily="34" charset="-122"/>
                 <a:cs typeface="Times New Roman" pitchFamily="34" charset="-120"/>
               </a:rPr>
-              <a:t>It is manure made from rotten biodegradable waste.</a:t>
+              <a:t>It is waste that rots naturally.</a:t>
             </a:r>
             <a:endParaRPr lang="en-US" sz="4000" dirty="0"/>
           </a:p>
@@ -13808,7 +14164,7 @@
         <p:spPr>
           <a:xfrm>
             <a:off x="0" y="658368"/>
-            <a:ext cx="2468880" cy="5833872"/>
+            <a:ext cx="5120640" cy="5833872"/>
           </a:xfrm>
           <a:prstGeom prst="rect">
             <a:avLst/>
@@ -13823,8 +14179,8 @@
         </p:nvSpPr>
         <p:spPr>
           <a:xfrm>
-            <a:off x="2697480" y="1005840"/>
-            <a:ext cx="9174175" cy="731520"/>
+            <a:off x="5349240" y="1005840"/>
+            <a:ext cx="6522415" cy="731520"/>
           </a:xfrm>
           <a:prstGeom prst="rect">
             <a:avLst/>
@@ -13850,7 +14206,7 @@
                 <a:ea typeface="Times New Roman" pitchFamily="34" charset="-122"/>
                 <a:cs typeface="Times New Roman" pitchFamily="34" charset="-120"/>
               </a:rPr>
-              <a:t>1. Types and Sources of Waste</a:t>
+              <a:t>DEFINITIONS (continued)</a:t>
             </a:r>
             <a:endParaRPr lang="en-US" sz="3600" dirty="0"/>
           </a:p>
@@ -13864,8 +14220,8 @@
         </p:nvSpPr>
         <p:spPr>
           <a:xfrm>
-            <a:off x="2697480" y="1783080"/>
-            <a:ext cx="9174175" cy="4663440"/>
+            <a:off x="5349240" y="1783080"/>
+            <a:ext cx="6522415" cy="4663440"/>
           </a:xfrm>
           <a:prstGeom prst="rect">
             <a:avLst/>
@@ -13884,7 +14240,7 @@
               <a:buNone/>
             </a:pPr>
             <a:r>
-              <a:rPr lang="en-US" sz="4000" i="1" dirty="0">
+              <a:rPr lang="en-US" sz="4000" b="1" dirty="0">
                 <a:solidFill>
                   <a:srgbClr val="111111"/>
                 </a:solidFill>
@@ -13892,11 +14248,8 @@
                 <a:ea typeface="Times New Roman" pitchFamily="34" charset="-122"/>
                 <a:cs typeface="Times New Roman" pitchFamily="34" charset="-120"/>
               </a:rPr>
-              <a:t>Solid waste is classified as follows:</a:t>
-            </a:r>
-            <a:endParaRPr lang="en-US" sz="4000" dirty="0"/>
-          </a:p>
-          <a:p>
+              <a:t>Non-biodegradable waste: </a:t>
+            </a:r>
             <a:pPr algn="l" indent="0" marL="0">
               <a:spcAft>
                 <a:spcPts val="800"/>
@@ -13904,7 +14257,7 @@
               <a:buNone/>
             </a:pPr>
             <a:r>
-              <a:rPr lang="en-US" sz="4000" b="1" dirty="0">
+              <a:rPr lang="en-US" sz="4000" dirty="0">
                 <a:solidFill>
                   <a:srgbClr val="111111"/>
                 </a:solidFill>
@@ -13912,61 +14265,7 @@
                 <a:ea typeface="Times New Roman" pitchFamily="34" charset="-122"/>
                 <a:cs typeface="Times New Roman" pitchFamily="34" charset="-120"/>
               </a:rPr>
-              <a:t>Biodegradable waste: </a:t>
-            </a:r>
-            <a:pPr algn="l" indent="0" marL="0">
-              <a:spcAft>
-                <a:spcPts val="800"/>
-              </a:spcAft>
-              <a:buNone/>
-            </a:pPr>
-            <a:r>
-              <a:rPr lang="en-US" sz="4000" dirty="0">
-                <a:solidFill>
-                  <a:srgbClr val="111111"/>
-                </a:solidFill>
-                <a:latin typeface="Times New Roman" pitchFamily="34" charset="0"/>
-                <a:ea typeface="Times New Roman" pitchFamily="34" charset="-122"/>
-                <a:cs typeface="Times New Roman" pitchFamily="34" charset="-120"/>
-              </a:rPr>
-              <a:t>It rots naturally, like food remains, leaves and paper.</a:t>
-            </a:r>
-            <a:endParaRPr lang="en-US" sz="4000" dirty="0"/>
-          </a:p>
-          <a:p>
-            <a:pPr algn="l" indent="0" marL="0">
-              <a:spcAft>
-                <a:spcPts val="800"/>
-              </a:spcAft>
-              <a:buNone/>
-            </a:pPr>
-            <a:r>
-              <a:rPr lang="en-US" sz="4000" b="1" dirty="0">
-                <a:solidFill>
-                  <a:srgbClr val="111111"/>
-                </a:solidFill>
-                <a:latin typeface="Times New Roman" pitchFamily="34" charset="0"/>
-                <a:ea typeface="Times New Roman" pitchFamily="34" charset="-122"/>
-                <a:cs typeface="Times New Roman" pitchFamily="34" charset="-120"/>
-              </a:rPr>
-              <a:t>Non-biodegradable waste: </a:t>
-            </a:r>
-            <a:pPr algn="l" indent="0" marL="0">
-              <a:spcAft>
-                <a:spcPts val="800"/>
-              </a:spcAft>
-              <a:buNone/>
-            </a:pPr>
-            <a:r>
-              <a:rPr lang="en-US" sz="4000" dirty="0">
-                <a:solidFill>
-                  <a:srgbClr val="111111"/>
-                </a:solidFill>
-                <a:latin typeface="Times New Roman" pitchFamily="34" charset="0"/>
-                <a:ea typeface="Times New Roman" pitchFamily="34" charset="-122"/>
-                <a:cs typeface="Times New Roman" pitchFamily="34" charset="-120"/>
-              </a:rPr>
-              <a:t>It does not rot easily, like plastics, glass and metals.</a:t>
+              <a:t>It is waste that does not rot easily.</a:t>
             </a:r>
             <a:endParaRPr lang="en-US" sz="4000" dirty="0"/>
           </a:p>
@@ -14084,9 +14383,150 @@
           </a:p>
         </p:txBody>
       </p:sp>
+      <p:sp>
+        <p:nvSpPr>
+          <p:cNvPr id="3" name="Text 1"/>
+          <p:cNvSpPr/>
+          <p:nvPr/>
+        </p:nvSpPr>
+        <p:spPr>
+          <a:xfrm>
+            <a:off x="365760" y="1005840"/>
+            <a:ext cx="11460175" cy="731520"/>
+          </a:xfrm>
+          <a:prstGeom prst="rect">
+            <a:avLst/>
+          </a:prstGeom>
+          <a:noFill/>
+          <a:ln/>
+        </p:spPr>
+        <p:txBody>
+          <a:bodyPr wrap="square" lIns="0" tIns="0" rIns="0" bIns="0" rtlCol="0" anchor="ctr">
+            <a:normAutofit/>
+          </a:bodyPr>
+          <a:lstStyle/>
+          <a:p>
+            <a:pPr algn="ctr" indent="0" marL="0">
+              <a:buNone/>
+            </a:pPr>
+            <a:r>
+              <a:rPr lang="en-US" sz="3600" b="1" dirty="0">
+                <a:solidFill>
+                  <a:srgbClr val="990011"/>
+                </a:solidFill>
+                <a:latin typeface="Times New Roman" pitchFamily="34" charset="0"/>
+                <a:ea typeface="Times New Roman" pitchFamily="34" charset="-122"/>
+                <a:cs typeface="Times New Roman" pitchFamily="34" charset="-120"/>
+              </a:rPr>
+              <a:t>1. Types and Sources of Waste</a:t>
+            </a:r>
+            <a:endParaRPr lang="en-US" sz="3600" dirty="0"/>
+          </a:p>
+        </p:txBody>
+      </p:sp>
+      <p:sp>
+        <p:nvSpPr>
+          <p:cNvPr id="4" name="Text 2"/>
+          <p:cNvSpPr/>
+          <p:nvPr/>
+        </p:nvSpPr>
+        <p:spPr>
+          <a:xfrm>
+            <a:off x="365760" y="1737360"/>
+            <a:ext cx="5120640" cy="457200"/>
+          </a:xfrm>
+          <a:prstGeom prst="rect">
+            <a:avLst/>
+          </a:prstGeom>
+          <a:noFill/>
+          <a:ln/>
+        </p:spPr>
+        <p:txBody>
+          <a:bodyPr wrap="square" lIns="0" tIns="0" rIns="0" bIns="0" rtlCol="0" anchor="ctr">
+            <a:normAutofit/>
+          </a:bodyPr>
+          <a:lstStyle/>
+          <a:p>
+            <a:pPr algn="l" indent="0" marL="0">
+              <a:buNone/>
+            </a:pPr>
+            <a:r>
+              <a:rPr lang="en-US" sz="3000" b="1" dirty="0">
+                <a:solidFill>
+                  <a:srgbClr val="990011"/>
+                </a:solidFill>
+                <a:latin typeface="Times New Roman" pitchFamily="34" charset="0"/>
+                <a:ea typeface="Times New Roman" pitchFamily="34" charset="-122"/>
+                <a:cs typeface="Times New Roman" pitchFamily="34" charset="-120"/>
+              </a:rPr>
+              <a:t>A) Types of Waste</a:t>
+            </a:r>
+            <a:endParaRPr lang="en-US" sz="3000" dirty="0"/>
+          </a:p>
+        </p:txBody>
+      </p:sp>
+      <p:sp>
+        <p:nvSpPr>
+          <p:cNvPr id="5" name="Text 3"/>
+          <p:cNvSpPr/>
+          <p:nvPr/>
+        </p:nvSpPr>
+        <p:spPr>
+          <a:xfrm>
+            <a:off x="365760" y="2240280"/>
+            <a:ext cx="4846320" cy="4160520"/>
+          </a:xfrm>
+          <a:prstGeom prst="rect">
+            <a:avLst/>
+          </a:prstGeom>
+          <a:noFill/>
+          <a:ln/>
+        </p:spPr>
+        <p:txBody>
+          <a:bodyPr wrap="square" lIns="0" tIns="0" rIns="0" bIns="0" rtlCol="0" anchor="t"/>
+          <a:lstStyle/>
+          <a:p>
+            <a:pPr algn="l" indent="0" marL="0">
+              <a:spcAft>
+                <a:spcPts val="800"/>
+              </a:spcAft>
+              <a:buNone/>
+            </a:pPr>
+            <a:r>
+              <a:rPr lang="en-US" sz="3600" b="1" dirty="0">
+                <a:solidFill>
+                  <a:srgbClr val="111111"/>
+                </a:solidFill>
+                <a:latin typeface="Times New Roman" pitchFamily="34" charset="0"/>
+                <a:ea typeface="Times New Roman" pitchFamily="34" charset="-122"/>
+                <a:cs typeface="Times New Roman" pitchFamily="34" charset="-120"/>
+              </a:rPr>
+              <a:t>Biodegradable waste: </a:t>
+            </a:r>
+            <a:pPr algn="l" indent="0" marL="0">
+              <a:spcAft>
+                <a:spcPts val="800"/>
+              </a:spcAft>
+              <a:buNone/>
+            </a:pPr>
+            <a:r>
+              <a:rPr lang="en-US" sz="3600" dirty="0">
+                <a:solidFill>
+                  <a:srgbClr val="111111"/>
+                </a:solidFill>
+                <a:latin typeface="Times New Roman" pitchFamily="34" charset="0"/>
+                <a:ea typeface="Times New Roman" pitchFamily="34" charset="-122"/>
+                <a:cs typeface="Times New Roman" pitchFamily="34" charset="-120"/>
+              </a:rPr>
+              <a:t>Examples are food remains, peelings, leaves and paper.</a:t>
+            </a:r>
+            <a:endParaRPr lang="en-US" sz="3600" dirty="0"/>
+          </a:p>
+        </p:txBody>
+      </p:sp>
       <p:pic>
         <p:nvPicPr>
-          <p:cNvPr id="3" name="Image 0" descr="/home/claude/f4/img/minesec_sheet.png">    </p:cNvPr>
+          <p:cNvPr id="6" name="Image 0" descr="/home/claude/f4/img/v2/waste_sort_big.png">    </p:cNvPr>
           <p:cNvPicPr>
             <a:picLocks noChangeAspect="1"/>
           </p:cNvPicPr>
@@ -14100,8 +14540,8 @@
         </p:blipFill>
         <p:spPr>
           <a:xfrm>
-            <a:off x="0" y="658368"/>
-            <a:ext cx="5120640" cy="5833872"/>
+            <a:off x="5349240" y="2617506"/>
+            <a:ext cx="6659575" cy="2601397"/>
           </a:xfrm>
           <a:prstGeom prst="rect">
             <a:avLst/>
@@ -14110,14 +14550,14 @@
       </p:pic>
       <p:sp>
         <p:nvSpPr>
-          <p:cNvPr id="4" name="Text 1"/>
+          <p:cNvPr id="7" name="Text 4"/>
           <p:cNvSpPr/>
           <p:nvPr/>
         </p:nvSpPr>
         <p:spPr>
           <a:xfrm>
-            <a:off x="5349240" y="1005840"/>
-            <a:ext cx="6522415" cy="731520"/>
+            <a:off x="5349240" y="6089904"/>
+            <a:ext cx="6659575" cy="347472"/>
           </a:xfrm>
           <a:prstGeom prst="rect">
             <a:avLst/>
@@ -14126,85 +14566,24 @@
           <a:ln/>
         </p:spPr>
         <p:txBody>
-          <a:bodyPr wrap="square" lIns="0" tIns="0" rIns="0" bIns="0" rtlCol="0" anchor="ctr">
-            <a:normAutofit/>
-          </a:bodyPr>
+          <a:bodyPr wrap="square" lIns="0" tIns="0" rIns="0" bIns="0" rtlCol="0" anchor="ctr"/>
           <a:lstStyle/>
           <a:p>
             <a:pPr algn="ctr" indent="0" marL="0">
               <a:buNone/>
             </a:pPr>
             <a:r>
-              <a:rPr lang="en-US" sz="3600" b="1" dirty="0">
-                <a:solidFill>
-                  <a:srgbClr val="990011"/>
+              <a:rPr lang="en-US" sz="1600" i="1" dirty="0">
+                <a:solidFill>
+                  <a:srgbClr val="555555"/>
                 </a:solidFill>
                 <a:latin typeface="Times New Roman" pitchFamily="34" charset="0"/>
                 <a:ea typeface="Times New Roman" pitchFamily="34" charset="-122"/>
                 <a:cs typeface="Times New Roman" pitchFamily="34" charset="-120"/>
               </a:rPr>
-              <a:t>1. Types and Sources of Waste (continued)</a:t>
-            </a:r>
-            <a:endParaRPr lang="en-US" sz="3600" dirty="0"/>
-          </a:p>
-        </p:txBody>
-      </p:sp>
-      <p:sp>
-        <p:nvSpPr>
-          <p:cNvPr id="5" name="Text 2"/>
-          <p:cNvSpPr/>
-          <p:nvPr/>
-        </p:nvSpPr>
-        <p:spPr>
-          <a:xfrm>
-            <a:off x="5349240" y="1783080"/>
-            <a:ext cx="6522415" cy="4663440"/>
-          </a:xfrm>
-          <a:prstGeom prst="rect">
-            <a:avLst/>
-          </a:prstGeom>
-          <a:noFill/>
-          <a:ln/>
-        </p:spPr>
-        <p:txBody>
-          <a:bodyPr wrap="square" lIns="0" tIns="0" rIns="0" bIns="0" rtlCol="0" anchor="t"/>
-          <a:lstStyle/>
-          <a:p>
-            <a:pPr algn="l" indent="0" marL="0">
-              <a:spcAft>
-                <a:spcPts val="800"/>
-              </a:spcAft>
-              <a:buNone/>
-            </a:pPr>
-            <a:r>
-              <a:rPr lang="en-US" sz="4000" b="1" dirty="0">
-                <a:solidFill>
-                  <a:srgbClr val="111111"/>
-                </a:solidFill>
-                <a:latin typeface="Times New Roman" pitchFamily="34" charset="0"/>
-                <a:ea typeface="Times New Roman" pitchFamily="34" charset="-122"/>
-                <a:cs typeface="Times New Roman" pitchFamily="34" charset="-120"/>
-              </a:rPr>
-              <a:t>Sources: </a:t>
-            </a:r>
-            <a:pPr algn="l" indent="0" marL="0">
-              <a:spcAft>
-                <a:spcPts val="800"/>
-              </a:spcAft>
-              <a:buNone/>
-            </a:pPr>
-            <a:r>
-              <a:rPr lang="en-US" sz="4000" dirty="0">
-                <a:solidFill>
-                  <a:srgbClr val="111111"/>
-                </a:solidFill>
-                <a:latin typeface="Times New Roman" pitchFamily="34" charset="0"/>
-                <a:ea typeface="Times New Roman" pitchFamily="34" charset="-122"/>
-                <a:cs typeface="Times New Roman" pitchFamily="34" charset="-120"/>
-              </a:rPr>
-              <a:t>Waste comes from homes, markets, schools and factories.</a:t>
-            </a:r>
-            <a:endParaRPr lang="en-US" sz="4000" dirty="0"/>
+              <a:t>Illustration: sorting waste</a:t>
+            </a:r>
+            <a:endParaRPr lang="en-US" sz="1600" dirty="0"/>
           </a:p>
         </p:txBody>
       </p:sp>
@@ -14328,8 +14707,8 @@
         </p:nvSpPr>
         <p:spPr>
           <a:xfrm>
-            <a:off x="457200" y="1005840"/>
-            <a:ext cx="11277295" cy="731520"/>
+            <a:off x="365760" y="1005840"/>
+            <a:ext cx="11460175" cy="731520"/>
           </a:xfrm>
           <a:prstGeom prst="rect">
             <a:avLst/>
@@ -14338,7 +14717,9 @@
           <a:ln/>
         </p:spPr>
         <p:txBody>
-          <a:bodyPr wrap="square" lIns="0" tIns="0" rIns="0" bIns="0" rtlCol="0" anchor="ctr"/>
+          <a:bodyPr wrap="square" lIns="0" tIns="0" rIns="0" bIns="0" rtlCol="0" anchor="ctr">
+            <a:normAutofit/>
+          </a:bodyPr>
           <a:lstStyle/>
           <a:p>
             <a:pPr algn="ctr" indent="0" marL="0">
@@ -14359,9 +14740,109 @@
           </a:p>
         </p:txBody>
       </p:sp>
+      <p:sp>
+        <p:nvSpPr>
+          <p:cNvPr id="4" name="Text 2"/>
+          <p:cNvSpPr/>
+          <p:nvPr/>
+        </p:nvSpPr>
+        <p:spPr>
+          <a:xfrm>
+            <a:off x="365760" y="1737360"/>
+            <a:ext cx="5120640" cy="457200"/>
+          </a:xfrm>
+          <a:prstGeom prst="rect">
+            <a:avLst/>
+          </a:prstGeom>
+          <a:noFill/>
+          <a:ln/>
+        </p:spPr>
+        <p:txBody>
+          <a:bodyPr wrap="square" lIns="0" tIns="0" rIns="0" bIns="0" rtlCol="0" anchor="ctr">
+            <a:normAutofit/>
+          </a:bodyPr>
+          <a:lstStyle/>
+          <a:p>
+            <a:pPr algn="l" indent="0" marL="0">
+              <a:buNone/>
+            </a:pPr>
+            <a:r>
+              <a:rPr lang="en-US" sz="3000" b="1" dirty="0">
+                <a:solidFill>
+                  <a:srgbClr val="990011"/>
+                </a:solidFill>
+                <a:latin typeface="Times New Roman" pitchFamily="34" charset="0"/>
+                <a:ea typeface="Times New Roman" pitchFamily="34" charset="-122"/>
+                <a:cs typeface="Times New Roman" pitchFamily="34" charset="-120"/>
+              </a:rPr>
+              <a:t>A) Types of Waste</a:t>
+            </a:r>
+            <a:endParaRPr lang="en-US" sz="3000" dirty="0"/>
+          </a:p>
+        </p:txBody>
+      </p:sp>
+      <p:sp>
+        <p:nvSpPr>
+          <p:cNvPr id="5" name="Text 3"/>
+          <p:cNvSpPr/>
+          <p:nvPr/>
+        </p:nvSpPr>
+        <p:spPr>
+          <a:xfrm>
+            <a:off x="365760" y="2240280"/>
+            <a:ext cx="4846320" cy="4160520"/>
+          </a:xfrm>
+          <a:prstGeom prst="rect">
+            <a:avLst/>
+          </a:prstGeom>
+          <a:noFill/>
+          <a:ln/>
+        </p:spPr>
+        <p:txBody>
+          <a:bodyPr wrap="square" lIns="0" tIns="0" rIns="0" bIns="0" rtlCol="0" anchor="t"/>
+          <a:lstStyle/>
+          <a:p>
+            <a:pPr algn="l" indent="0" marL="0">
+              <a:spcAft>
+                <a:spcPts val="800"/>
+              </a:spcAft>
+              <a:buNone/>
+            </a:pPr>
+            <a:r>
+              <a:rPr lang="en-US" sz="3600" b="1" dirty="0">
+                <a:solidFill>
+                  <a:srgbClr val="111111"/>
+                </a:solidFill>
+                <a:latin typeface="Times New Roman" pitchFamily="34" charset="0"/>
+                <a:ea typeface="Times New Roman" pitchFamily="34" charset="-122"/>
+                <a:cs typeface="Times New Roman" pitchFamily="34" charset="-120"/>
+              </a:rPr>
+              <a:t>Non-biodegradable waste: </a:t>
+            </a:r>
+            <a:pPr algn="l" indent="0" marL="0">
+              <a:spcAft>
+                <a:spcPts val="800"/>
+              </a:spcAft>
+              <a:buNone/>
+            </a:pPr>
+            <a:r>
+              <a:rPr lang="en-US" sz="3600" dirty="0">
+                <a:solidFill>
+                  <a:srgbClr val="111111"/>
+                </a:solidFill>
+                <a:latin typeface="Times New Roman" pitchFamily="34" charset="0"/>
+                <a:ea typeface="Times New Roman" pitchFamily="34" charset="-122"/>
+                <a:cs typeface="Times New Roman" pitchFamily="34" charset="-120"/>
+              </a:rPr>
+              <a:t>Examples are plastic sachets and bottles, glass and metal tins.</a:t>
+            </a:r>
+            <a:endParaRPr lang="en-US" sz="3600" dirty="0"/>
+          </a:p>
+        </p:txBody>
+      </p:sp>
       <p:pic>
         <p:nvPicPr>
-          <p:cNvPr id="4" name="Image 0" descr="/home/claude/f4/img/v2/waste_sort_big.png">    </p:cNvPr>
+          <p:cNvPr id="6" name="Image 0" descr="/home/claude/f4/img/v2/usa_litter.jpg">    </p:cNvPr>
           <p:cNvPicPr>
             <a:picLocks noChangeAspect="1"/>
           </p:cNvPicPr>
@@ -14375,8 +14856,8 @@
         </p:blipFill>
         <p:spPr>
           <a:xfrm>
-            <a:off x="629930" y="1783080"/>
-            <a:ext cx="10931835" cy="4270248"/>
+            <a:off x="5349240" y="2071212"/>
+            <a:ext cx="6659575" cy="3693983"/>
           </a:xfrm>
           <a:prstGeom prst="rect">
             <a:avLst/>
@@ -14385,14 +14866,14 @@
       </p:pic>
       <p:sp>
         <p:nvSpPr>
-          <p:cNvPr id="5" name="Text 2"/>
+          <p:cNvPr id="7" name="Text 4"/>
           <p:cNvSpPr/>
           <p:nvPr/>
         </p:nvSpPr>
         <p:spPr>
           <a:xfrm>
-            <a:off x="457200" y="6089904"/>
-            <a:ext cx="11277295" cy="347472"/>
+            <a:off x="5349240" y="6089904"/>
+            <a:ext cx="6659575" cy="347472"/>
           </a:xfrm>
           <a:prstGeom prst="rect">
             <a:avLst/>
@@ -14408,7 +14889,7 @@
               <a:buNone/>
             </a:pPr>
             <a:r>
-              <a:rPr lang="en-US" sz="1800" i="1" dirty="0">
+              <a:rPr lang="en-US" sz="1600" i="1" dirty="0">
                 <a:solidFill>
                   <a:srgbClr val="555555"/>
                 </a:solidFill>
@@ -14416,9 +14897,9 @@
                 <a:ea typeface="Times New Roman" pitchFamily="34" charset="-122"/>
                 <a:cs typeface="Times New Roman" pitchFamily="34" charset="-120"/>
               </a:rPr>
-              <a:t>Illustration: sorting waste</a:t>
-            </a:r>
-            <a:endParaRPr lang="en-US" sz="1800" dirty="0"/>
+              <a:t>Illustration: plastic litter</a:t>
+            </a:r>
+            <a:endParaRPr lang="en-US" sz="1600" dirty="0"/>
           </a:p>
         </p:txBody>
       </p:sp>
@@ -14593,7 +15074,7 @@
                 <a:ea typeface="Times New Roman" pitchFamily="34" charset="-122"/>
                 <a:cs typeface="Times New Roman" pitchFamily="34" charset="-120"/>
               </a:rPr>
-              <a:t>2. Managing Waste at School</a:t>
+              <a:t>1. Types and Sources of Waste</a:t>
             </a:r>
             <a:endParaRPr lang="en-US" sz="3600" dirty="0"/>
           </a:p>
@@ -14607,8 +15088,47 @@
         </p:nvSpPr>
         <p:spPr>
           <a:xfrm>
-            <a:off x="2697480" y="1783080"/>
-            <a:ext cx="9174175" cy="4663440"/>
+            <a:off x="2697480" y="1737360"/>
+            <a:ext cx="9174175" cy="457200"/>
+          </a:xfrm>
+          <a:prstGeom prst="rect">
+            <a:avLst/>
+          </a:prstGeom>
+          <a:noFill/>
+          <a:ln/>
+        </p:spPr>
+        <p:txBody>
+          <a:bodyPr wrap="square" lIns="0" tIns="0" rIns="0" bIns="0" rtlCol="0" anchor="ctr"/>
+          <a:lstStyle/>
+          <a:p>
+            <a:pPr algn="l" indent="0" marL="0">
+              <a:buNone/>
+            </a:pPr>
+            <a:r>
+              <a:rPr lang="en-US" sz="3200" b="1" dirty="0">
+                <a:solidFill>
+                  <a:srgbClr val="990011"/>
+                </a:solidFill>
+                <a:latin typeface="Times New Roman" pitchFamily="34" charset="0"/>
+                <a:ea typeface="Times New Roman" pitchFamily="34" charset="-122"/>
+                <a:cs typeface="Times New Roman" pitchFamily="34" charset="-120"/>
+              </a:rPr>
+              <a:t>B) Sources of Waste</a:t>
+            </a:r>
+            <a:endParaRPr lang="en-US" sz="3200" dirty="0"/>
+          </a:p>
+        </p:txBody>
+      </p:sp>
+      <p:sp>
+        <p:nvSpPr>
+          <p:cNvPr id="6" name="Text 3"/>
+          <p:cNvSpPr/>
+          <p:nvPr/>
+        </p:nvSpPr>
+        <p:spPr>
+          <a:xfrm>
+            <a:off x="2697480" y="2240280"/>
+            <a:ext cx="9174175" cy="4206240"/>
           </a:xfrm>
           <a:prstGeom prst="rect">
             <a:avLst/>
@@ -14627,7 +15147,7 @@
               <a:buNone/>
             </a:pPr>
             <a:r>
-              <a:rPr lang="en-US" sz="4000" i="1" dirty="0">
+              <a:rPr lang="en-US" sz="4000" b="1" dirty="0">
                 <a:solidFill>
                   <a:srgbClr val="111111"/>
                 </a:solidFill>
@@ -14635,11 +15155,8 @@
                 <a:ea typeface="Times New Roman" pitchFamily="34" charset="-122"/>
                 <a:cs typeface="Times New Roman" pitchFamily="34" charset="-120"/>
               </a:rPr>
-              <a:t>We manage solid waste in the following steps:</a:t>
-            </a:r>
-            <a:endParaRPr lang="en-US" sz="4000" dirty="0"/>
-          </a:p>
-          <a:p>
+              <a:t>Homes: </a:t>
+            </a:r>
             <a:pPr algn="l" indent="0" marL="0">
               <a:spcAft>
                 <a:spcPts val="800"/>
@@ -14647,7 +15164,7 @@
               <a:buNone/>
             </a:pPr>
             <a:r>
-              <a:rPr lang="en-US" sz="4000" b="1" dirty="0">
+              <a:rPr lang="en-US" sz="4000" dirty="0">
                 <a:solidFill>
                   <a:srgbClr val="111111"/>
                 </a:solidFill>
@@ -14655,8 +15172,11 @@
                 <a:ea typeface="Times New Roman" pitchFamily="34" charset="-122"/>
                 <a:cs typeface="Times New Roman" pitchFamily="34" charset="-120"/>
               </a:rPr>
-              <a:t>Collection: </a:t>
-            </a:r>
+              <a:t>They produce food remains, packaging and old objects.</a:t>
+            </a:r>
+            <a:endParaRPr lang="en-US" sz="4000" dirty="0"/>
+          </a:p>
+          <a:p>
             <a:pPr algn="l" indent="0" marL="0">
               <a:spcAft>
                 <a:spcPts val="800"/>
@@ -14664,7 +15184,7 @@
               <a:buNone/>
             </a:pPr>
             <a:r>
-              <a:rPr lang="en-US" sz="4000" dirty="0">
+              <a:rPr lang="en-US" sz="4000" b="1" dirty="0">
                 <a:solidFill>
                   <a:srgbClr val="111111"/>
                 </a:solidFill>
@@ -14672,11 +15192,8 @@
                 <a:ea typeface="Times New Roman" pitchFamily="34" charset="-122"/>
                 <a:cs typeface="Times New Roman" pitchFamily="34" charset="-120"/>
               </a:rPr>
-              <a:t>We collect the waste around the school campus with gloves and bags.</a:t>
-            </a:r>
-            <a:endParaRPr lang="en-US" sz="4000" dirty="0"/>
-          </a:p>
-          <a:p>
+              <a:t>Markets: </a:t>
+            </a:r>
             <a:pPr algn="l" indent="0" marL="0">
               <a:spcAft>
                 <a:spcPts val="800"/>
@@ -14684,7 +15201,7 @@
               <a:buNone/>
             </a:pPr>
             <a:r>
-              <a:rPr lang="en-US" sz="4000" b="1" dirty="0">
+              <a:rPr lang="en-US" sz="4000" dirty="0">
                 <a:solidFill>
                   <a:srgbClr val="111111"/>
                 </a:solidFill>
@@ -14692,8 +15209,11 @@
                 <a:ea typeface="Times New Roman" pitchFamily="34" charset="-122"/>
                 <a:cs typeface="Times New Roman" pitchFamily="34" charset="-120"/>
               </a:rPr>
-              <a:t>Sorting: </a:t>
-            </a:r>
+              <a:t>They produce rotten fruits and vegetables, sachets and boxes.</a:t>
+            </a:r>
+            <a:endParaRPr lang="en-US" sz="4000" dirty="0"/>
+          </a:p>
+          <a:p>
             <a:pPr algn="l" indent="0" marL="0">
               <a:spcAft>
                 <a:spcPts val="800"/>
@@ -14701,7 +15221,7 @@
               <a:buNone/>
             </a:pPr>
             <a:r>
-              <a:rPr lang="en-US" sz="4000" dirty="0">
+              <a:rPr lang="en-US" sz="4000" b="1" dirty="0">
                 <a:solidFill>
                   <a:srgbClr val="111111"/>
                 </a:solidFill>
@@ -14709,7 +15229,24 @@
                 <a:ea typeface="Times New Roman" pitchFamily="34" charset="-122"/>
                 <a:cs typeface="Times New Roman" pitchFamily="34" charset="-120"/>
               </a:rPr>
-              <a:t>We separate biodegradable waste from non-biodegradable waste.</a:t>
+              <a:t>Schools: </a:t>
+            </a:r>
+            <a:pPr algn="l" indent="0" marL="0">
+              <a:spcAft>
+                <a:spcPts val="800"/>
+              </a:spcAft>
+              <a:buNone/>
+            </a:pPr>
+            <a:r>
+              <a:rPr lang="en-US" sz="4000" dirty="0">
+                <a:solidFill>
+                  <a:srgbClr val="111111"/>
+                </a:solidFill>
+                <a:latin typeface="Times New Roman" pitchFamily="34" charset="0"/>
+                <a:ea typeface="Times New Roman" pitchFamily="34" charset="-122"/>
+                <a:cs typeface="Times New Roman" pitchFamily="34" charset="-120"/>
+              </a:rPr>
+              <a:t>They produce paper, sachets and bottles.</a:t>
             </a:r>
             <a:endParaRPr lang="en-US" sz="4000" dirty="0"/>
           </a:p>
@@ -15125,7 +15662,7 @@
                 <a:ea typeface="Times New Roman" pitchFamily="34" charset="-122"/>
                 <a:cs typeface="Times New Roman" pitchFamily="34" charset="-120"/>
               </a:rPr>
-              <a:t>2. Managing Waste at School (continued)</a:t>
+              <a:t>1. Types and Sources of Waste</a:t>
             </a:r>
             <a:endParaRPr lang="en-US" sz="3600" dirty="0"/>
           </a:p>
@@ -15139,8 +15676,47 @@
         </p:nvSpPr>
         <p:spPr>
           <a:xfrm>
-            <a:off x="5349240" y="1783080"/>
-            <a:ext cx="6522415" cy="4663440"/>
+            <a:off x="5349240" y="1737360"/>
+            <a:ext cx="6522415" cy="457200"/>
+          </a:xfrm>
+          <a:prstGeom prst="rect">
+            <a:avLst/>
+          </a:prstGeom>
+          <a:noFill/>
+          <a:ln/>
+        </p:spPr>
+        <p:txBody>
+          <a:bodyPr wrap="square" lIns="0" tIns="0" rIns="0" bIns="0" rtlCol="0" anchor="ctr"/>
+          <a:lstStyle/>
+          <a:p>
+            <a:pPr algn="l" indent="0" marL="0">
+              <a:buNone/>
+            </a:pPr>
+            <a:r>
+              <a:rPr lang="en-US" sz="3200" b="1" dirty="0">
+                <a:solidFill>
+                  <a:srgbClr val="990011"/>
+                </a:solidFill>
+                <a:latin typeface="Times New Roman" pitchFamily="34" charset="0"/>
+                <a:ea typeface="Times New Roman" pitchFamily="34" charset="-122"/>
+                <a:cs typeface="Times New Roman" pitchFamily="34" charset="-120"/>
+              </a:rPr>
+              <a:t>B) Sources of Waste (continued)</a:t>
+            </a:r>
+            <a:endParaRPr lang="en-US" sz="3200" dirty="0"/>
+          </a:p>
+        </p:txBody>
+      </p:sp>
+      <p:sp>
+        <p:nvSpPr>
+          <p:cNvPr id="6" name="Text 3"/>
+          <p:cNvSpPr/>
+          <p:nvPr/>
+        </p:nvSpPr>
+        <p:spPr>
+          <a:xfrm>
+            <a:off x="5349240" y="2240280"/>
+            <a:ext cx="6522415" cy="4206240"/>
           </a:xfrm>
           <a:prstGeom prst="rect">
             <a:avLst/>
@@ -15167,7 +15743,7 @@
                 <a:ea typeface="Times New Roman" pitchFamily="34" charset="-122"/>
                 <a:cs typeface="Times New Roman" pitchFamily="34" charset="-120"/>
               </a:rPr>
-              <a:t>Disposal: </a:t>
+              <a:t>Factories and workshops: </a:t>
             </a:r>
             <a:pPr algn="l" indent="0" marL="0">
               <a:spcAft>
@@ -15184,7 +15760,7 @@
                 <a:ea typeface="Times New Roman" pitchFamily="34" charset="-122"/>
                 <a:cs typeface="Times New Roman" pitchFamily="34" charset="-120"/>
               </a:rPr>
-              <a:t>We put biodegradable waste in a compost pit and send plastics, glass and metals to recycling or bury them.</a:t>
+              <a:t>They produce metal, plastic and chemical waste.</a:t>
             </a:r>
             <a:endParaRPr lang="en-US" sz="4000" dirty="0"/>
           </a:p>
@@ -15296,15 +15872,135 @@
                 <a:ea typeface="Calibri" pitchFamily="34" charset="-122"/>
                 <a:cs typeface="Calibri" pitchFamily="34" charset="-120"/>
               </a:rPr>
-              <a:t>FORMATIVE EVALUATION</a:t>
+              <a:t>BOARD SUMMARY</a:t>
             </a:r>
             <a:endParaRPr lang="en-US" sz="1400" dirty="0"/>
+          </a:p>
+        </p:txBody>
+      </p:sp>
+      <p:sp>
+        <p:nvSpPr>
+          <p:cNvPr id="3" name="Text 1"/>
+          <p:cNvSpPr/>
+          <p:nvPr/>
+        </p:nvSpPr>
+        <p:spPr>
+          <a:xfrm>
+            <a:off x="365760" y="1005840"/>
+            <a:ext cx="11460175" cy="731520"/>
+          </a:xfrm>
+          <a:prstGeom prst="rect">
+            <a:avLst/>
+          </a:prstGeom>
+          <a:noFill/>
+          <a:ln/>
+        </p:spPr>
+        <p:txBody>
+          <a:bodyPr wrap="square" lIns="0" tIns="0" rIns="0" bIns="0" rtlCol="0" anchor="ctr">
+            <a:normAutofit/>
+          </a:bodyPr>
+          <a:lstStyle/>
+          <a:p>
+            <a:pPr algn="ctr" indent="0" marL="0">
+              <a:buNone/>
+            </a:pPr>
+            <a:r>
+              <a:rPr lang="en-US" sz="3600" b="1" dirty="0">
+                <a:solidFill>
+                  <a:srgbClr val="990011"/>
+                </a:solidFill>
+                <a:latin typeface="Times New Roman" pitchFamily="34" charset="0"/>
+                <a:ea typeface="Times New Roman" pitchFamily="34" charset="-122"/>
+                <a:cs typeface="Times New Roman" pitchFamily="34" charset="-120"/>
+              </a:rPr>
+              <a:t>2. Managing Waste at School</a:t>
+            </a:r>
+            <a:endParaRPr lang="en-US" sz="3600" dirty="0"/>
+          </a:p>
+        </p:txBody>
+      </p:sp>
+      <p:sp>
+        <p:nvSpPr>
+          <p:cNvPr id="4" name="Text 2"/>
+          <p:cNvSpPr/>
+          <p:nvPr/>
+        </p:nvSpPr>
+        <p:spPr>
+          <a:xfrm>
+            <a:off x="365760" y="1783080"/>
+            <a:ext cx="4846320" cy="4617720"/>
+          </a:xfrm>
+          <a:prstGeom prst="rect">
+            <a:avLst/>
+          </a:prstGeom>
+          <a:noFill/>
+          <a:ln/>
+        </p:spPr>
+        <p:txBody>
+          <a:bodyPr wrap="square" lIns="0" tIns="0" rIns="0" bIns="0" rtlCol="0" anchor="t"/>
+          <a:lstStyle/>
+          <a:p>
+            <a:pPr algn="l" indent="0" marL="0">
+              <a:spcAft>
+                <a:spcPts val="800"/>
+              </a:spcAft>
+              <a:buNone/>
+            </a:pPr>
+            <a:r>
+              <a:rPr lang="en-US" sz="3600" i="1" dirty="0">
+                <a:solidFill>
+                  <a:srgbClr val="111111"/>
+                </a:solidFill>
+                <a:latin typeface="Times New Roman" pitchFamily="34" charset="0"/>
+                <a:ea typeface="Times New Roman" pitchFamily="34" charset="-122"/>
+                <a:cs typeface="Times New Roman" pitchFamily="34" charset="-120"/>
+              </a:rPr>
+              <a:t>We manage solid waste in the following steps:</a:t>
+            </a:r>
+            <a:endParaRPr lang="en-US" sz="3600" dirty="0"/>
+          </a:p>
+          <a:p>
+            <a:pPr algn="l" indent="0" marL="0">
+              <a:spcAft>
+                <a:spcPts val="800"/>
+              </a:spcAft>
+              <a:buNone/>
+            </a:pPr>
+            <a:r>
+              <a:rPr lang="en-US" sz="3600" b="1" dirty="0">
+                <a:solidFill>
+                  <a:srgbClr val="111111"/>
+                </a:solidFill>
+                <a:latin typeface="Times New Roman" pitchFamily="34" charset="0"/>
+                <a:ea typeface="Times New Roman" pitchFamily="34" charset="-122"/>
+                <a:cs typeface="Times New Roman" pitchFamily="34" charset="-120"/>
+              </a:rPr>
+              <a:t>Collection: </a:t>
+            </a:r>
+            <a:pPr algn="l" indent="0" marL="0">
+              <a:spcAft>
+                <a:spcPts val="800"/>
+              </a:spcAft>
+              <a:buNone/>
+            </a:pPr>
+            <a:r>
+              <a:rPr lang="en-US" sz="3600" dirty="0">
+                <a:solidFill>
+                  <a:srgbClr val="111111"/>
+                </a:solidFill>
+                <a:latin typeface="Times New Roman" pitchFamily="34" charset="0"/>
+                <a:ea typeface="Times New Roman" pitchFamily="34" charset="-122"/>
+                <a:cs typeface="Times New Roman" pitchFamily="34" charset="-120"/>
+              </a:rPr>
+              <a:t>We collect the waste around the school campus with gloves and bags.</a:t>
+            </a:r>
+            <a:endParaRPr lang="en-US" sz="3600" dirty="0"/>
           </a:p>
         </p:txBody>
       </p:sp>
       <p:pic>
         <p:nvPicPr>
-          <p:cNvPr id="3" name="Image 0" descr="/home/claude/f4/img/minesec_sheet.png">    </p:cNvPr>
+          <p:cNvPr id="5" name="Image 0" descr="/home/claude/f4/img/v2/usa_litter.jpg">    </p:cNvPr>
           <p:cNvPicPr>
             <a:picLocks noChangeAspect="1"/>
           </p:cNvPicPr>
@@ -15318,8 +16014,8 @@
         </p:blipFill>
         <p:spPr>
           <a:xfrm>
-            <a:off x="0" y="658368"/>
-            <a:ext cx="5120640" cy="5833872"/>
+            <a:off x="5349240" y="2071212"/>
+            <a:ext cx="6659575" cy="3693983"/>
           </a:xfrm>
           <a:prstGeom prst="rect">
             <a:avLst/>
@@ -15328,14 +16024,14 @@
       </p:pic>
       <p:sp>
         <p:nvSpPr>
-          <p:cNvPr id="4" name="Text 1"/>
+          <p:cNvPr id="6" name="Text 3"/>
           <p:cNvSpPr/>
           <p:nvPr/>
         </p:nvSpPr>
         <p:spPr>
           <a:xfrm>
-            <a:off x="5349240" y="1005840"/>
-            <a:ext cx="6522415" cy="731520"/>
+            <a:off x="5349240" y="6089904"/>
+            <a:ext cx="6659575" cy="347472"/>
           </a:xfrm>
           <a:prstGeom prst="rect">
             <a:avLst/>
@@ -15344,68 +16040,24 @@
           <a:ln/>
         </p:spPr>
         <p:txBody>
-          <a:bodyPr wrap="square" lIns="0" tIns="0" rIns="0" bIns="0" rtlCol="0" anchor="ctr">
-            <a:normAutofit/>
-          </a:bodyPr>
+          <a:bodyPr wrap="square" lIns="0" tIns="0" rIns="0" bIns="0" rtlCol="0" anchor="ctr"/>
           <a:lstStyle/>
           <a:p>
             <a:pPr algn="ctr" indent="0" marL="0">
               <a:buNone/>
             </a:pPr>
             <a:r>
-              <a:rPr lang="en-US" sz="3600" b="1" dirty="0">
-                <a:solidFill>
-                  <a:srgbClr val="990011"/>
+              <a:rPr lang="en-US" sz="1600" i="1" dirty="0">
+                <a:solidFill>
+                  <a:srgbClr val="555555"/>
                 </a:solidFill>
                 <a:latin typeface="Times New Roman" pitchFamily="34" charset="0"/>
                 <a:ea typeface="Times New Roman" pitchFamily="34" charset="-122"/>
                 <a:cs typeface="Times New Roman" pitchFamily="34" charset="-120"/>
               </a:rPr>
-              <a:t>Evaluation 1</a:t>
-            </a:r>
-            <a:endParaRPr lang="en-US" sz="3600" dirty="0"/>
-          </a:p>
-        </p:txBody>
-      </p:sp>
-      <p:sp>
-        <p:nvSpPr>
-          <p:cNvPr id="5" name="Text 2"/>
-          <p:cNvSpPr/>
-          <p:nvPr/>
-        </p:nvSpPr>
-        <p:spPr>
-          <a:xfrm>
-            <a:off x="5349240" y="1783080"/>
-            <a:ext cx="6522415" cy="4663440"/>
-          </a:xfrm>
-          <a:prstGeom prst="rect">
-            <a:avLst/>
-          </a:prstGeom>
-          <a:noFill/>
-          <a:ln/>
-        </p:spPr>
-        <p:txBody>
-          <a:bodyPr wrap="square" lIns="0" tIns="0" rIns="0" bIns="0" rtlCol="0" anchor="t"/>
-          <a:lstStyle/>
-          <a:p>
-            <a:pPr algn="l" indent="0" marL="0">
-              <a:spcAft>
-                <a:spcPts val="800"/>
-              </a:spcAft>
-              <a:buNone/>
-            </a:pPr>
-            <a:r>
-              <a:rPr lang="en-US" sz="4000" dirty="0">
-                <a:solidFill>
-                  <a:srgbClr val="111111"/>
-                </a:solidFill>
-                <a:latin typeface="Times New Roman" pitchFamily="34" charset="0"/>
-                <a:ea typeface="Times New Roman" pitchFamily="34" charset="-122"/>
-                <a:cs typeface="Times New Roman" pitchFamily="34" charset="-120"/>
-              </a:rPr>
-              <a:t>Give two examples of biodegradable and two of non-biodegradable waste.</a:t>
-            </a:r>
-            <a:endParaRPr lang="en-US" sz="4000" dirty="0"/>
+              <a:t>Illustration: waste to collect</a:t>
+            </a:r>
+            <a:endParaRPr lang="en-US" sz="1600" dirty="0"/>
           </a:p>
         </p:txBody>
       </p:sp>
@@ -15515,15 +16167,115 @@
                 <a:ea typeface="Calibri" pitchFamily="34" charset="-122"/>
                 <a:cs typeface="Calibri" pitchFamily="34" charset="-120"/>
               </a:rPr>
-              <a:t>FORMATIVE EVALUATION</a:t>
+              <a:t>BOARD SUMMARY</a:t>
             </a:r>
             <a:endParaRPr lang="en-US" sz="1400" dirty="0"/>
+          </a:p>
+        </p:txBody>
+      </p:sp>
+      <p:sp>
+        <p:nvSpPr>
+          <p:cNvPr id="3" name="Text 1"/>
+          <p:cNvSpPr/>
+          <p:nvPr/>
+        </p:nvSpPr>
+        <p:spPr>
+          <a:xfrm>
+            <a:off x="365760" y="1005840"/>
+            <a:ext cx="11460175" cy="731520"/>
+          </a:xfrm>
+          <a:prstGeom prst="rect">
+            <a:avLst/>
+          </a:prstGeom>
+          <a:noFill/>
+          <a:ln/>
+        </p:spPr>
+        <p:txBody>
+          <a:bodyPr wrap="square" lIns="0" tIns="0" rIns="0" bIns="0" rtlCol="0" anchor="ctr">
+            <a:normAutofit/>
+          </a:bodyPr>
+          <a:lstStyle/>
+          <a:p>
+            <a:pPr algn="ctr" indent="0" marL="0">
+              <a:buNone/>
+            </a:pPr>
+            <a:r>
+              <a:rPr lang="en-US" sz="3600" b="1" dirty="0">
+                <a:solidFill>
+                  <a:srgbClr val="990011"/>
+                </a:solidFill>
+                <a:latin typeface="Times New Roman" pitchFamily="34" charset="0"/>
+                <a:ea typeface="Times New Roman" pitchFamily="34" charset="-122"/>
+                <a:cs typeface="Times New Roman" pitchFamily="34" charset="-120"/>
+              </a:rPr>
+              <a:t>2. Managing Waste at School</a:t>
+            </a:r>
+            <a:endParaRPr lang="en-US" sz="3600" dirty="0"/>
+          </a:p>
+        </p:txBody>
+      </p:sp>
+      <p:sp>
+        <p:nvSpPr>
+          <p:cNvPr id="4" name="Text 2"/>
+          <p:cNvSpPr/>
+          <p:nvPr/>
+        </p:nvSpPr>
+        <p:spPr>
+          <a:xfrm>
+            <a:off x="365760" y="1783080"/>
+            <a:ext cx="4846320" cy="4617720"/>
+          </a:xfrm>
+          <a:prstGeom prst="rect">
+            <a:avLst/>
+          </a:prstGeom>
+          <a:noFill/>
+          <a:ln/>
+        </p:spPr>
+        <p:txBody>
+          <a:bodyPr wrap="square" lIns="0" tIns="0" rIns="0" bIns="0" rtlCol="0" anchor="t"/>
+          <a:lstStyle/>
+          <a:p>
+            <a:pPr algn="l" indent="0" marL="0">
+              <a:spcAft>
+                <a:spcPts val="800"/>
+              </a:spcAft>
+              <a:buNone/>
+            </a:pPr>
+            <a:r>
+              <a:rPr lang="en-US" sz="3600" b="1" dirty="0">
+                <a:solidFill>
+                  <a:srgbClr val="111111"/>
+                </a:solidFill>
+                <a:latin typeface="Times New Roman" pitchFamily="34" charset="0"/>
+                <a:ea typeface="Times New Roman" pitchFamily="34" charset="-122"/>
+                <a:cs typeface="Times New Roman" pitchFamily="34" charset="-120"/>
+              </a:rPr>
+              <a:t>Sorting: </a:t>
+            </a:r>
+            <a:pPr algn="l" indent="0" marL="0">
+              <a:spcAft>
+                <a:spcPts val="800"/>
+              </a:spcAft>
+              <a:buNone/>
+            </a:pPr>
+            <a:r>
+              <a:rPr lang="en-US" sz="3600" dirty="0">
+                <a:solidFill>
+                  <a:srgbClr val="111111"/>
+                </a:solidFill>
+                <a:latin typeface="Times New Roman" pitchFamily="34" charset="0"/>
+                <a:ea typeface="Times New Roman" pitchFamily="34" charset="-122"/>
+                <a:cs typeface="Times New Roman" pitchFamily="34" charset="-120"/>
+              </a:rPr>
+              <a:t>We separate biodegradable waste from non-biodegradable waste.</a:t>
+            </a:r>
+            <a:endParaRPr lang="en-US" sz="3600" dirty="0"/>
           </a:p>
         </p:txBody>
       </p:sp>
       <p:pic>
         <p:nvPicPr>
-          <p:cNvPr id="3" name="Image 0" descr="/home/claude/f4/img/minesec_sheet.png">    </p:cNvPr>
+          <p:cNvPr id="5" name="Image 0" descr="/home/claude/f4/img/v2/waste_sort_big.png">    </p:cNvPr>
           <p:cNvPicPr>
             <a:picLocks noChangeAspect="1"/>
           </p:cNvPicPr>
@@ -15537,8 +16289,8 @@
         </p:blipFill>
         <p:spPr>
           <a:xfrm>
-            <a:off x="0" y="658368"/>
-            <a:ext cx="5120640" cy="5833872"/>
+            <a:off x="5349240" y="2617506"/>
+            <a:ext cx="6659575" cy="2601397"/>
           </a:xfrm>
           <a:prstGeom prst="rect">
             <a:avLst/>
@@ -15547,14 +16299,14 @@
       </p:pic>
       <p:sp>
         <p:nvSpPr>
-          <p:cNvPr id="4" name="Text 1"/>
+          <p:cNvPr id="6" name="Text 3"/>
           <p:cNvSpPr/>
           <p:nvPr/>
         </p:nvSpPr>
         <p:spPr>
           <a:xfrm>
-            <a:off x="5349240" y="1005840"/>
-            <a:ext cx="6522415" cy="731520"/>
+            <a:off x="5349240" y="6089904"/>
+            <a:ext cx="6659575" cy="347472"/>
           </a:xfrm>
           <a:prstGeom prst="rect">
             <a:avLst/>
@@ -15563,68 +16315,24 @@
           <a:ln/>
         </p:spPr>
         <p:txBody>
-          <a:bodyPr wrap="square" lIns="0" tIns="0" rIns="0" bIns="0" rtlCol="0" anchor="ctr">
-            <a:normAutofit/>
-          </a:bodyPr>
+          <a:bodyPr wrap="square" lIns="0" tIns="0" rIns="0" bIns="0" rtlCol="0" anchor="ctr"/>
           <a:lstStyle/>
           <a:p>
             <a:pPr algn="ctr" indent="0" marL="0">
               <a:buNone/>
             </a:pPr>
             <a:r>
-              <a:rPr lang="en-US" sz="3600" b="1" dirty="0">
-                <a:solidFill>
-                  <a:srgbClr val="990011"/>
+              <a:rPr lang="en-US" sz="1600" i="1" dirty="0">
+                <a:solidFill>
+                  <a:srgbClr val="555555"/>
                 </a:solidFill>
                 <a:latin typeface="Times New Roman" pitchFamily="34" charset="0"/>
                 <a:ea typeface="Times New Roman" pitchFamily="34" charset="-122"/>
                 <a:cs typeface="Times New Roman" pitchFamily="34" charset="-120"/>
               </a:rPr>
-              <a:t>Expected Answer</a:t>
-            </a:r>
-            <a:endParaRPr lang="en-US" sz="3600" dirty="0"/>
-          </a:p>
-        </p:txBody>
-      </p:sp>
-      <p:sp>
-        <p:nvSpPr>
-          <p:cNvPr id="5" name="Text 2"/>
-          <p:cNvSpPr/>
-          <p:nvPr/>
-        </p:nvSpPr>
-        <p:spPr>
-          <a:xfrm>
-            <a:off x="5349240" y="1783080"/>
-            <a:ext cx="6522415" cy="4663440"/>
-          </a:xfrm>
-          <a:prstGeom prst="rect">
-            <a:avLst/>
-          </a:prstGeom>
-          <a:noFill/>
-          <a:ln/>
-        </p:spPr>
-        <p:txBody>
-          <a:bodyPr wrap="square" lIns="0" tIns="0" rIns="0" bIns="0" rtlCol="0" anchor="t"/>
-          <a:lstStyle/>
-          <a:p>
-            <a:pPr algn="l" indent="0" marL="0">
-              <a:spcAft>
-                <a:spcPts val="800"/>
-              </a:spcAft>
-              <a:buNone/>
-            </a:pPr>
-            <a:r>
-              <a:rPr lang="en-US" sz="4000" dirty="0">
-                <a:solidFill>
-                  <a:srgbClr val="111111"/>
-                </a:solidFill>
-                <a:latin typeface="Times New Roman" pitchFamily="34" charset="0"/>
-                <a:ea typeface="Times New Roman" pitchFamily="34" charset="-122"/>
-                <a:cs typeface="Times New Roman" pitchFamily="34" charset="-120"/>
-              </a:rPr>
-              <a:t>Biodegradable: food remains, leaves. Non-biodegradable: plastic bottles, glass.</a:t>
-            </a:r>
-            <a:endParaRPr lang="en-US" sz="4000" dirty="0"/>
+              <a:t>Illustration: sorting waste</a:t>
+            </a:r>
+            <a:endParaRPr lang="en-US" sz="1600" dirty="0"/>
           </a:p>
         </p:txBody>
       </p:sp>
@@ -15734,15 +16442,115 @@
                 <a:ea typeface="Calibri" pitchFamily="34" charset="-122"/>
                 <a:cs typeface="Calibri" pitchFamily="34" charset="-120"/>
               </a:rPr>
-              <a:t>FORMATIVE EVALUATION</a:t>
+              <a:t>BOARD SUMMARY</a:t>
             </a:r>
             <a:endParaRPr lang="en-US" sz="1400" dirty="0"/>
+          </a:p>
+        </p:txBody>
+      </p:sp>
+      <p:sp>
+        <p:nvSpPr>
+          <p:cNvPr id="3" name="Text 1"/>
+          <p:cNvSpPr/>
+          <p:nvPr/>
+        </p:nvSpPr>
+        <p:spPr>
+          <a:xfrm>
+            <a:off x="365760" y="1005840"/>
+            <a:ext cx="11460175" cy="731520"/>
+          </a:xfrm>
+          <a:prstGeom prst="rect">
+            <a:avLst/>
+          </a:prstGeom>
+          <a:noFill/>
+          <a:ln/>
+        </p:spPr>
+        <p:txBody>
+          <a:bodyPr wrap="square" lIns="0" tIns="0" rIns="0" bIns="0" rtlCol="0" anchor="ctr">
+            <a:normAutofit/>
+          </a:bodyPr>
+          <a:lstStyle/>
+          <a:p>
+            <a:pPr algn="ctr" indent="0" marL="0">
+              <a:buNone/>
+            </a:pPr>
+            <a:r>
+              <a:rPr lang="en-US" sz="3600" b="1" dirty="0">
+                <a:solidFill>
+                  <a:srgbClr val="990011"/>
+                </a:solidFill>
+                <a:latin typeface="Times New Roman" pitchFamily="34" charset="0"/>
+                <a:ea typeface="Times New Roman" pitchFamily="34" charset="-122"/>
+                <a:cs typeface="Times New Roman" pitchFamily="34" charset="-120"/>
+              </a:rPr>
+              <a:t>2. Managing Waste at School</a:t>
+            </a:r>
+            <a:endParaRPr lang="en-US" sz="3600" dirty="0"/>
+          </a:p>
+        </p:txBody>
+      </p:sp>
+      <p:sp>
+        <p:nvSpPr>
+          <p:cNvPr id="4" name="Text 2"/>
+          <p:cNvSpPr/>
+          <p:nvPr/>
+        </p:nvSpPr>
+        <p:spPr>
+          <a:xfrm>
+            <a:off x="365760" y="1783080"/>
+            <a:ext cx="4846320" cy="4617720"/>
+          </a:xfrm>
+          <a:prstGeom prst="rect">
+            <a:avLst/>
+          </a:prstGeom>
+          <a:noFill/>
+          <a:ln/>
+        </p:spPr>
+        <p:txBody>
+          <a:bodyPr wrap="square" lIns="0" tIns="0" rIns="0" bIns="0" rtlCol="0" anchor="t"/>
+          <a:lstStyle/>
+          <a:p>
+            <a:pPr algn="l" indent="0" marL="0">
+              <a:spcAft>
+                <a:spcPts val="800"/>
+              </a:spcAft>
+              <a:buNone/>
+            </a:pPr>
+            <a:r>
+              <a:rPr lang="en-US" sz="3600" b="1" dirty="0">
+                <a:solidFill>
+                  <a:srgbClr val="111111"/>
+                </a:solidFill>
+                <a:latin typeface="Times New Roman" pitchFamily="34" charset="0"/>
+                <a:ea typeface="Times New Roman" pitchFamily="34" charset="-122"/>
+                <a:cs typeface="Times New Roman" pitchFamily="34" charset="-120"/>
+              </a:rPr>
+              <a:t>Disposal site 1 (compost): </a:t>
+            </a:r>
+            <a:pPr algn="l" indent="0" marL="0">
+              <a:spcAft>
+                <a:spcPts val="800"/>
+              </a:spcAft>
+              <a:buNone/>
+            </a:pPr>
+            <a:r>
+              <a:rPr lang="en-US" sz="3600" dirty="0">
+                <a:solidFill>
+                  <a:srgbClr val="111111"/>
+                </a:solidFill>
+                <a:latin typeface="Times New Roman" pitchFamily="34" charset="0"/>
+                <a:ea typeface="Times New Roman" pitchFamily="34" charset="-122"/>
+                <a:cs typeface="Times New Roman" pitchFamily="34" charset="-120"/>
+              </a:rPr>
+              <a:t>We put food remains and leaves in a compost pit to make manure.</a:t>
+            </a:r>
+            <a:endParaRPr lang="en-US" sz="3600" dirty="0"/>
           </a:p>
         </p:txBody>
       </p:sp>
       <p:pic>
         <p:nvPicPr>
-          <p:cNvPr id="3" name="Image 0" descr="/home/claude/f4/img/minesec_sheet.png">    </p:cNvPr>
+          <p:cNvPr id="5" name="Image 0" descr="/home/claude/f4/img/v2/f2t_mixed_farm.jpg">    </p:cNvPr>
           <p:cNvPicPr>
             <a:picLocks noChangeAspect="1"/>
           </p:cNvPicPr>
@@ -15756,8 +16564,8 @@
         </p:blipFill>
         <p:spPr>
           <a:xfrm>
-            <a:off x="0" y="658368"/>
-            <a:ext cx="5120640" cy="5833872"/>
+            <a:off x="5349240" y="2071212"/>
+            <a:ext cx="6659575" cy="3693983"/>
           </a:xfrm>
           <a:prstGeom prst="rect">
             <a:avLst/>
@@ -15766,14 +16574,14 @@
       </p:pic>
       <p:sp>
         <p:nvSpPr>
-          <p:cNvPr id="4" name="Text 1"/>
+          <p:cNvPr id="6" name="Text 3"/>
           <p:cNvSpPr/>
           <p:nvPr/>
         </p:nvSpPr>
         <p:spPr>
           <a:xfrm>
-            <a:off x="5349240" y="1005840"/>
-            <a:ext cx="6522415" cy="731520"/>
+            <a:off x="5349240" y="6089904"/>
+            <a:ext cx="6659575" cy="347472"/>
           </a:xfrm>
           <a:prstGeom prst="rect">
             <a:avLst/>
@@ -15782,68 +16590,24 @@
           <a:ln/>
         </p:spPr>
         <p:txBody>
-          <a:bodyPr wrap="square" lIns="0" tIns="0" rIns="0" bIns="0" rtlCol="0" anchor="ctr">
-            <a:normAutofit/>
-          </a:bodyPr>
+          <a:bodyPr wrap="square" lIns="0" tIns="0" rIns="0" bIns="0" rtlCol="0" anchor="ctr"/>
           <a:lstStyle/>
           <a:p>
             <a:pPr algn="ctr" indent="0" marL="0">
               <a:buNone/>
             </a:pPr>
             <a:r>
-              <a:rPr lang="en-US" sz="3600" b="1" dirty="0">
-                <a:solidFill>
-                  <a:srgbClr val="990011"/>
+              <a:rPr lang="en-US" sz="1600" i="1" dirty="0">
+                <a:solidFill>
+                  <a:srgbClr val="555555"/>
                 </a:solidFill>
                 <a:latin typeface="Times New Roman" pitchFamily="34" charset="0"/>
                 <a:ea typeface="Times New Roman" pitchFamily="34" charset="-122"/>
                 <a:cs typeface="Times New Roman" pitchFamily="34" charset="-120"/>
               </a:rPr>
-              <a:t>Evaluation 2</a:t>
-            </a:r>
-            <a:endParaRPr lang="en-US" sz="3600" dirty="0"/>
-          </a:p>
-        </p:txBody>
-      </p:sp>
-      <p:sp>
-        <p:nvSpPr>
-          <p:cNvPr id="5" name="Text 2"/>
-          <p:cNvSpPr/>
-          <p:nvPr/>
-        </p:nvSpPr>
-        <p:spPr>
-          <a:xfrm>
-            <a:off x="5349240" y="1783080"/>
-            <a:ext cx="6522415" cy="4663440"/>
-          </a:xfrm>
-          <a:prstGeom prst="rect">
-            <a:avLst/>
-          </a:prstGeom>
-          <a:noFill/>
-          <a:ln/>
-        </p:spPr>
-        <p:txBody>
-          <a:bodyPr wrap="square" lIns="0" tIns="0" rIns="0" bIns="0" rtlCol="0" anchor="t"/>
-          <a:lstStyle/>
-          <a:p>
-            <a:pPr algn="l" indent="0" marL="0">
-              <a:spcAft>
-                <a:spcPts val="800"/>
-              </a:spcAft>
-              <a:buNone/>
-            </a:pPr>
-            <a:r>
-              <a:rPr lang="en-US" sz="4000" dirty="0">
-                <a:solidFill>
-                  <a:srgbClr val="111111"/>
-                </a:solidFill>
-                <a:latin typeface="Times New Roman" pitchFamily="34" charset="0"/>
-                <a:ea typeface="Times New Roman" pitchFamily="34" charset="-122"/>
-                <a:cs typeface="Times New Roman" pitchFamily="34" charset="-120"/>
-              </a:rPr>
-              <a:t>What is compost used for?</a:t>
-            </a:r>
-            <a:endParaRPr lang="en-US" sz="4000" dirty="0"/>
+              <a:t>Illustration: compost is used on farms</a:t>
+            </a:r>
+            <a:endParaRPr lang="en-US" sz="1600" dirty="0"/>
           </a:p>
         </p:txBody>
       </p:sp>
@@ -15953,7 +16717,7 @@
                 <a:ea typeface="Calibri" pitchFamily="34" charset="-122"/>
                 <a:cs typeface="Calibri" pitchFamily="34" charset="-120"/>
               </a:rPr>
-              <a:t>FORMATIVE EVALUATION</a:t>
+              <a:t>BOARD SUMMARY</a:t>
             </a:r>
             <a:endParaRPr lang="en-US" sz="1400" dirty="0"/>
           </a:p>
@@ -15976,7 +16740,7 @@
         <p:spPr>
           <a:xfrm>
             <a:off x="0" y="658368"/>
-            <a:ext cx="5120640" cy="5833872"/>
+            <a:ext cx="3840480" cy="5833872"/>
           </a:xfrm>
           <a:prstGeom prst="rect">
             <a:avLst/>
@@ -15991,8 +16755,8 @@
         </p:nvSpPr>
         <p:spPr>
           <a:xfrm>
-            <a:off x="5349240" y="1005840"/>
-            <a:ext cx="6522415" cy="731520"/>
+            <a:off x="4069080" y="1005840"/>
+            <a:ext cx="7802575" cy="731520"/>
           </a:xfrm>
           <a:prstGeom prst="rect">
             <a:avLst/>
@@ -16018,7 +16782,7 @@
                 <a:ea typeface="Times New Roman" pitchFamily="34" charset="-122"/>
                 <a:cs typeface="Times New Roman" pitchFamily="34" charset="-120"/>
               </a:rPr>
-              <a:t>Expected Answer</a:t>
+              <a:t>2. Managing Waste at School</a:t>
             </a:r>
             <a:endParaRPr lang="en-US" sz="3600" dirty="0"/>
           </a:p>
@@ -16032,8 +16796,8 @@
         </p:nvSpPr>
         <p:spPr>
           <a:xfrm>
-            <a:off x="5349240" y="1783080"/>
-            <a:ext cx="6522415" cy="4663440"/>
+            <a:off x="4069080" y="1783080"/>
+            <a:ext cx="7802575" cy="4663440"/>
           </a:xfrm>
           <a:prstGeom prst="rect">
             <a:avLst/>
@@ -16052,7 +16816,7 @@
               <a:buNone/>
             </a:pPr>
             <a:r>
-              <a:rPr lang="en-US" sz="4000" dirty="0">
+              <a:rPr lang="en-US" sz="4000" b="1" dirty="0">
                 <a:solidFill>
                   <a:srgbClr val="111111"/>
                 </a:solidFill>
@@ -16060,7 +16824,61 @@
                 <a:ea typeface="Times New Roman" pitchFamily="34" charset="-122"/>
                 <a:cs typeface="Times New Roman" pitchFamily="34" charset="-120"/>
               </a:rPr>
-              <a:t>To make the soil fertile.</a:t>
+              <a:t>Disposal site 2 (burning): </a:t>
+            </a:r>
+            <a:pPr algn="l" indent="0" marL="0">
+              <a:spcAft>
+                <a:spcPts val="800"/>
+              </a:spcAft>
+              <a:buNone/>
+            </a:pPr>
+            <a:r>
+              <a:rPr lang="en-US" sz="4000" dirty="0">
+                <a:solidFill>
+                  <a:srgbClr val="111111"/>
+                </a:solidFill>
+                <a:latin typeface="Times New Roman" pitchFamily="34" charset="0"/>
+                <a:ea typeface="Times New Roman" pitchFamily="34" charset="-122"/>
+                <a:cs typeface="Times New Roman" pitchFamily="34" charset="-120"/>
+              </a:rPr>
+              <a:t>We burn old papers in a safe place.</a:t>
+            </a:r>
+            <a:endParaRPr lang="en-US" sz="4000" dirty="0"/>
+          </a:p>
+          <a:p>
+            <a:pPr algn="l" indent="0" marL="0">
+              <a:spcAft>
+                <a:spcPts val="800"/>
+              </a:spcAft>
+              <a:buNone/>
+            </a:pPr>
+            <a:r>
+              <a:rPr lang="en-US" sz="4000" b="1" dirty="0">
+                <a:solidFill>
+                  <a:srgbClr val="111111"/>
+                </a:solidFill>
+                <a:latin typeface="Times New Roman" pitchFamily="34" charset="0"/>
+                <a:ea typeface="Times New Roman" pitchFamily="34" charset="-122"/>
+                <a:cs typeface="Times New Roman" pitchFamily="34" charset="-120"/>
+              </a:rPr>
+              <a:t>Disposal site 3 (recycling or burying): </a:t>
+            </a:r>
+            <a:pPr algn="l" indent="0" marL="0">
+              <a:spcAft>
+                <a:spcPts val="800"/>
+              </a:spcAft>
+              <a:buNone/>
+            </a:pPr>
+            <a:r>
+              <a:rPr lang="en-US" sz="4000" dirty="0">
+                <a:solidFill>
+                  <a:srgbClr val="111111"/>
+                </a:solidFill>
+                <a:latin typeface="Times New Roman" pitchFamily="34" charset="0"/>
+                <a:ea typeface="Times New Roman" pitchFamily="34" charset="-122"/>
+                <a:cs typeface="Times New Roman" pitchFamily="34" charset="-120"/>
+              </a:rPr>
+              <a:t>We send plastics, glass and metals to a recycling unit, or we bury them if there is none.</a:t>
             </a:r>
             <a:endParaRPr lang="en-US" sz="4000" dirty="0"/>
           </a:p>
@@ -16172,7 +16990,7 @@
                 <a:ea typeface="Calibri" pitchFamily="34" charset="-122"/>
                 <a:cs typeface="Calibri" pitchFamily="34" charset="-120"/>
               </a:rPr>
-              <a:t>REMEDIATION</a:t>
+              <a:t>FORMATIVE EVALUATION</a:t>
             </a:r>
             <a:endParaRPr lang="en-US" sz="1400" dirty="0"/>
           </a:p>
@@ -16237,7 +17055,7 @@
                 <a:ea typeface="Times New Roman" pitchFamily="34" charset="-122"/>
                 <a:cs typeface="Times New Roman" pitchFamily="34" charset="-120"/>
               </a:rPr>
-              <a:t>Remediation</a:t>
+              <a:t>Evaluation 1</a:t>
             </a:r>
             <a:endParaRPr lang="en-US" sz="3600" dirty="0"/>
           </a:p>
@@ -16271,7 +17089,7 @@
               <a:buNone/>
             </a:pPr>
             <a:r>
-              <a:rPr lang="en-US" sz="4000" b="1" dirty="0">
+              <a:rPr lang="en-US" sz="4000" dirty="0">
                 <a:solidFill>
                   <a:srgbClr val="111111"/>
                 </a:solidFill>
@@ -16279,73 +17097,7 @@
                 <a:ea typeface="Times New Roman" pitchFamily="34" charset="-122"/>
                 <a:cs typeface="Times New Roman" pitchFamily="34" charset="-120"/>
               </a:rPr>
-              <a:t>Fill in the blanks:</a:t>
-            </a:r>
-            <a:endParaRPr lang="en-US" sz="4000" dirty="0"/>
-          </a:p>
-          <a:p>
-            <a:pPr algn="l" marL="342900" indent="-342900">
-              <a:spcAft>
-                <a:spcPts val="800"/>
-              </a:spcAft>
-              <a:buSzPct val="100000"/>
-              <a:buFont typeface="+mj-lt"/>
-              <a:buAutoNum type="arabicPeriod" startAt="1"/>
-            </a:pPr>
-            <a:r>
-              <a:rPr lang="en-US" sz="4000" dirty="0">
-                <a:solidFill>
-                  <a:srgbClr val="111111"/>
-                </a:solidFill>
-                <a:latin typeface="Times New Roman" pitchFamily="34" charset="0"/>
-                <a:ea typeface="Times New Roman" pitchFamily="34" charset="-122"/>
-                <a:cs typeface="Times New Roman" pitchFamily="34" charset="-120"/>
-              </a:rPr>
-              <a:t>Waste that rots naturally is ______.</a:t>
-            </a:r>
-            <a:endParaRPr lang="en-US" sz="4000" dirty="0"/>
-          </a:p>
-          <a:p>
-            <a:pPr algn="l" marL="342900" indent="-342900">
-              <a:spcAft>
-                <a:spcPts val="800"/>
-              </a:spcAft>
-              <a:buSzPct val="100000"/>
-              <a:buFont typeface="+mj-lt"/>
-              <a:buAutoNum type="arabicPeriod" startAt="1"/>
-            </a:pPr>
-            <a:r>
-              <a:rPr lang="en-US" sz="4000" dirty="0">
-                <a:solidFill>
-                  <a:srgbClr val="111111"/>
-                </a:solidFill>
-                <a:latin typeface="Times New Roman" pitchFamily="34" charset="0"/>
-                <a:ea typeface="Times New Roman" pitchFamily="34" charset="-122"/>
-                <a:cs typeface="Times New Roman" pitchFamily="34" charset="-120"/>
-              </a:rPr>
-              <a:t>Plastics are ______ waste.</a:t>
-            </a:r>
-            <a:endParaRPr lang="en-US" sz="4000" dirty="0"/>
-          </a:p>
-          <a:p>
-            <a:pPr algn="l" marL="342900" indent="-342900">
-              <a:spcAft>
-                <a:spcPts val="800"/>
-              </a:spcAft>
-              <a:buSzPct val="100000"/>
-              <a:buFont typeface="+mj-lt"/>
-              <a:buAutoNum type="arabicPeriod" startAt="1"/>
-            </a:pPr>
-            <a:r>
-              <a:rPr lang="en-US" sz="4000" dirty="0">
-                <a:solidFill>
-                  <a:srgbClr val="111111"/>
-                </a:solidFill>
-                <a:latin typeface="Times New Roman" pitchFamily="34" charset="0"/>
-                <a:ea typeface="Times New Roman" pitchFamily="34" charset="-122"/>
-                <a:cs typeface="Times New Roman" pitchFamily="34" charset="-120"/>
-              </a:rPr>
-              <a:t>Manure made from rotten waste is ______.</a:t>
+              <a:t>Give two examples of biodegradable and two of non-biodegradable waste.</a:t>
             </a:r>
             <a:endParaRPr lang="en-US" sz="4000" dirty="0"/>
           </a:p>
@@ -16457,7 +17209,7 @@
                 <a:ea typeface="Calibri" pitchFamily="34" charset="-122"/>
                 <a:cs typeface="Calibri" pitchFamily="34" charset="-120"/>
               </a:rPr>
-              <a:t>HOMEWORK</a:t>
+              <a:t>FORMATIVE EVALUATION</a:t>
             </a:r>
             <a:endParaRPr lang="en-US" sz="1400" dirty="0"/>
           </a:p>
@@ -16522,7 +17274,7 @@
                 <a:ea typeface="Times New Roman" pitchFamily="34" charset="-122"/>
                 <a:cs typeface="Times New Roman" pitchFamily="34" charset="-120"/>
               </a:rPr>
-              <a:t>Homework</a:t>
+              <a:t>Expected Answer</a:t>
             </a:r>
             <a:endParaRPr lang="en-US" sz="3600" dirty="0"/>
           </a:p>
@@ -16564,7 +17316,7 @@
                 <a:ea typeface="Times New Roman" pitchFamily="34" charset="-122"/>
                 <a:cs typeface="Times New Roman" pitchFamily="34" charset="-120"/>
               </a:rPr>
-              <a:t>At home, sort the waste of one day into two groups and write what you found in each group.</a:t>
+              <a:t>Biodegradable: food remains, leaves. Non-biodegradable: plastic bottles, glass.</a:t>
             </a:r>
             <a:endParaRPr lang="en-US" sz="4000" dirty="0"/>
           </a:p>
@@ -16676,7 +17428,7 @@
                 <a:ea typeface="Calibri" pitchFamily="34" charset="-122"/>
                 <a:cs typeface="Calibri" pitchFamily="34" charset="-120"/>
               </a:rPr>
-              <a:t>NEXT LESSON</a:t>
+              <a:t>FORMATIVE EVALUATION</a:t>
             </a:r>
             <a:endParaRPr lang="en-US" sz="1400" dirty="0"/>
           </a:p>
@@ -16741,7 +17493,7 @@
                 <a:ea typeface="Times New Roman" pitchFamily="34" charset="-122"/>
                 <a:cs typeface="Times New Roman" pitchFamily="34" charset="-120"/>
               </a:rPr>
-              <a:t>Next Lesson</a:t>
+              <a:t>Evaluation 2</a:t>
             </a:r>
             <a:endParaRPr lang="en-US" sz="3600" dirty="0"/>
           </a:p>
@@ -16765,17 +17517,17 @@
           <a:ln/>
         </p:spPr>
         <p:txBody>
-          <a:bodyPr wrap="square" lIns="0" tIns="0" rIns="0" bIns="0" rtlCol="0" anchor="ctr"/>
-          <a:lstStyle/>
-          <a:p>
-            <a:pPr algn="ctr" indent="0" marL="0">
+          <a:bodyPr wrap="square" lIns="0" tIns="0" rIns="0" bIns="0" rtlCol="0" anchor="t"/>
+          <a:lstStyle/>
+          <a:p>
+            <a:pPr algn="l" indent="0" marL="0">
               <a:spcAft>
                 <a:spcPts val="800"/>
               </a:spcAft>
               <a:buNone/>
             </a:pPr>
             <a:r>
-              <a:rPr lang="en-US" sz="4000" b="1" dirty="0">
+              <a:rPr lang="en-US" sz="4000" dirty="0">
                 <a:solidFill>
                   <a:srgbClr val="111111"/>
                 </a:solidFill>
@@ -16783,27 +17535,7 @@
                 <a:ea typeface="Times New Roman" pitchFamily="34" charset="-122"/>
                 <a:cs typeface="Times New Roman" pitchFamily="34" charset="-120"/>
               </a:rPr>
-              <a:t>Our next lesson will be on:</a:t>
-            </a:r>
-            <a:endParaRPr lang="en-US" sz="4000" dirty="0"/>
-          </a:p>
-          <a:p>
-            <a:pPr algn="ctr" indent="0" marL="0">
-              <a:spcAft>
-                <a:spcPts val="800"/>
-              </a:spcAft>
-              <a:buNone/>
-            </a:pPr>
-            <a:r>
-              <a:rPr lang="en-US" sz="4000" b="1" dirty="0">
-                <a:solidFill>
-                  <a:srgbClr val="990011"/>
-                </a:solidFill>
-                <a:latin typeface="Times New Roman" pitchFamily="34" charset="0"/>
-                <a:ea typeface="Times New Roman" pitchFamily="34" charset="-122"/>
-                <a:cs typeface="Times New Roman" pitchFamily="34" charset="-120"/>
-              </a:rPr>
-              <a:t>Lesson 7: The Atmosphere</a:t>
+              <a:t>What is compost used for?</a:t>
             </a:r>
             <a:endParaRPr lang="en-US" sz="4000" dirty="0"/>
           </a:p>
@@ -16915,6 +17647,1187 @@
                 <a:ea typeface="Calibri" pitchFamily="34" charset="-122"/>
                 <a:cs typeface="Calibri" pitchFamily="34" charset="-120"/>
               </a:rPr>
+              <a:t>FORMATIVE EVALUATION</a:t>
+            </a:r>
+            <a:endParaRPr lang="en-US" sz="1400" dirty="0"/>
+          </a:p>
+        </p:txBody>
+      </p:sp>
+      <p:pic>
+        <p:nvPicPr>
+          <p:cNvPr id="3" name="Image 0" descr="/home/claude/f4/img/minesec_sheet.png">    </p:cNvPr>
+          <p:cNvPicPr>
+            <a:picLocks noChangeAspect="1"/>
+          </p:cNvPicPr>
+          <p:nvPr/>
+        </p:nvPicPr>
+        <p:blipFill>
+          <a:blip r:embed="rId1"/>
+          <a:stretch>
+            <a:fillRect/>
+          </a:stretch>
+        </p:blipFill>
+        <p:spPr>
+          <a:xfrm>
+            <a:off x="0" y="658368"/>
+            <a:ext cx="5120640" cy="5833872"/>
+          </a:xfrm>
+          <a:prstGeom prst="rect">
+            <a:avLst/>
+          </a:prstGeom>
+        </p:spPr>
+      </p:pic>
+      <p:sp>
+        <p:nvSpPr>
+          <p:cNvPr id="4" name="Text 1"/>
+          <p:cNvSpPr/>
+          <p:nvPr/>
+        </p:nvSpPr>
+        <p:spPr>
+          <a:xfrm>
+            <a:off x="5349240" y="1005840"/>
+            <a:ext cx="6522415" cy="731520"/>
+          </a:xfrm>
+          <a:prstGeom prst="rect">
+            <a:avLst/>
+          </a:prstGeom>
+          <a:noFill/>
+          <a:ln/>
+        </p:spPr>
+        <p:txBody>
+          <a:bodyPr wrap="square" lIns="0" tIns="0" rIns="0" bIns="0" rtlCol="0" anchor="ctr">
+            <a:normAutofit/>
+          </a:bodyPr>
+          <a:lstStyle/>
+          <a:p>
+            <a:pPr algn="ctr" indent="0" marL="0">
+              <a:buNone/>
+            </a:pPr>
+            <a:r>
+              <a:rPr lang="en-US" sz="3600" b="1" dirty="0">
+                <a:solidFill>
+                  <a:srgbClr val="990011"/>
+                </a:solidFill>
+                <a:latin typeface="Times New Roman" pitchFamily="34" charset="0"/>
+                <a:ea typeface="Times New Roman" pitchFamily="34" charset="-122"/>
+                <a:cs typeface="Times New Roman" pitchFamily="34" charset="-120"/>
+              </a:rPr>
+              <a:t>Expected Answer</a:t>
+            </a:r>
+            <a:endParaRPr lang="en-US" sz="3600" dirty="0"/>
+          </a:p>
+        </p:txBody>
+      </p:sp>
+      <p:sp>
+        <p:nvSpPr>
+          <p:cNvPr id="5" name="Text 2"/>
+          <p:cNvSpPr/>
+          <p:nvPr/>
+        </p:nvSpPr>
+        <p:spPr>
+          <a:xfrm>
+            <a:off x="5349240" y="1783080"/>
+            <a:ext cx="6522415" cy="4663440"/>
+          </a:xfrm>
+          <a:prstGeom prst="rect">
+            <a:avLst/>
+          </a:prstGeom>
+          <a:noFill/>
+          <a:ln/>
+        </p:spPr>
+        <p:txBody>
+          <a:bodyPr wrap="square" lIns="0" tIns="0" rIns="0" bIns="0" rtlCol="0" anchor="t"/>
+          <a:lstStyle/>
+          <a:p>
+            <a:pPr algn="l" indent="0" marL="0">
+              <a:spcAft>
+                <a:spcPts val="800"/>
+              </a:spcAft>
+              <a:buNone/>
+            </a:pPr>
+            <a:r>
+              <a:rPr lang="en-US" sz="4000" dirty="0">
+                <a:solidFill>
+                  <a:srgbClr val="111111"/>
+                </a:solidFill>
+                <a:latin typeface="Times New Roman" pitchFamily="34" charset="0"/>
+                <a:ea typeface="Times New Roman" pitchFamily="34" charset="-122"/>
+                <a:cs typeface="Times New Roman" pitchFamily="34" charset="-120"/>
+              </a:rPr>
+              <a:t>To make the soil fertile.</a:t>
+            </a:r>
+            <a:endParaRPr lang="en-US" sz="4000" dirty="0"/>
+          </a:p>
+        </p:txBody>
+      </p:sp>
+      <p:sp>
+        <p:nvSpPr>
+          <p:cNvPr id="25" name="Slide Number Placeholder 0"/>
+          <p:cNvSpPr>
+            <a:spLocks noGrp="1"/>
+          </p:cNvSpPr>
+          <p:nvPr>
+            <p:ph type="sldNum" sz="quarter" idx="4294967295"/>
+          </p:nvPr>
+        </p:nvSpPr>
+        <p:spPr>
+          <a:xfrm>
+            <a:off x="27432" y="91440"/>
+            <a:ext cx="585216" cy="475488"/>
+          </a:xfrm>
+          <a:prstGeom prst="rect">
+            <a:avLst/>
+          </a:prstGeom>
+          <a:extLst>
+            <a:ext uri="{C572A759-6A51-4108-AA02-DFA0A04FC94B}">
+              <ma14:wrappingTextBoxFlag xmlns:ma14="http://schemas.microsoft.com/office/mac/drawingml/2011/main" val="0"/>
+            </a:ext>
+          </a:extLst>
+        </p:spPr>
+        <p:txBody>
+          <a:bodyPr/>
+          <a:lstStyle>
+            <a:lvl1pPr>
+              <a:defRPr sz="2000">
+                <a:solidFill>
+                  <a:srgbClr val="FFFFFF"/>
+                </a:solidFill>
+                <a:latin typeface="Calibri"/>
+                <a:ea typeface="Calibri"/>
+                <a:cs typeface="Calibri"/>
+              </a:defRPr>
+            </a:lvl1pPr>
+          </a:lstStyle>
+          <a:p>
+            <a:pPr algn="ctr"/>
+            <a:fld id="{F7021451-1387-4CA6-816F-3879F97B5CBC}" type="slidenum">
+              <a:rPr b="1" lang="en-US"/>
+              <a:t>48</a:t>
+            </a:fld>
+            <a:endParaRPr lang="en-US"/>
+          </a:p>
+        </p:txBody>
+      </p:sp>
+    </p:spTree>
+  </p:cSld>
+  <p:clrMapOvr>
+    <a:masterClrMapping/>
+  </p:clrMapOvr>
+</p:sld>
+</file>
+
+<file path=ppt/slides/slide49.xml><?xml version="1.0" encoding="utf-8"?>
+<p:sld xmlns:a="http://schemas.openxmlformats.org/drawingml/2006/main" xmlns:r="http://schemas.openxmlformats.org/officeDocument/2006/relationships" xmlns:p="http://schemas.openxmlformats.org/presentationml/2006/main">
+  <p:cSld name="Slide 49">
+    <p:spTree>
+      <p:nvGrpSpPr>
+        <p:cNvPr id="1" name=""/>
+        <p:cNvGrpSpPr/>
+        <p:nvPr/>
+      </p:nvGrpSpPr>
+      <p:grpSpPr>
+        <a:xfrm>
+          <a:off x="0" y="0"/>
+          <a:ext cx="0" cy="0"/>
+          <a:chOff x="0" y="0"/>
+          <a:chExt cx="0" cy="0"/>
+        </a:xfrm>
+      </p:grpSpPr>
+      <p:sp>
+        <p:nvSpPr>
+          <p:cNvPr id="2" name="Text 0"/>
+          <p:cNvSpPr/>
+          <p:nvPr/>
+        </p:nvSpPr>
+        <p:spPr>
+          <a:xfrm>
+            <a:off x="457200" y="713232"/>
+            <a:ext cx="11368735" cy="274320"/>
+          </a:xfrm>
+          <a:prstGeom prst="rect">
+            <a:avLst/>
+          </a:prstGeom>
+          <a:noFill/>
+          <a:ln/>
+        </p:spPr>
+        <p:txBody>
+          <a:bodyPr wrap="square" lIns="0" tIns="0" rIns="0" bIns="0" rtlCol="0" anchor="ctr"/>
+          <a:lstStyle/>
+          <a:p>
+            <a:pPr algn="r" indent="0" marL="0">
+              <a:buNone/>
+            </a:pPr>
+            <a:r>
+              <a:rPr lang="en-US" sz="1400" b="1" dirty="0">
+                <a:solidFill>
+                  <a:srgbClr val="1C3F6E"/>
+                </a:solidFill>
+                <a:latin typeface="Calibri" pitchFamily="34" charset="0"/>
+                <a:ea typeface="Calibri" pitchFamily="34" charset="-122"/>
+                <a:cs typeface="Calibri" pitchFamily="34" charset="-120"/>
+              </a:rPr>
+              <a:t>REMEDIATION</a:t>
+            </a:r>
+            <a:endParaRPr lang="en-US" sz="1400" dirty="0"/>
+          </a:p>
+        </p:txBody>
+      </p:sp>
+      <p:pic>
+        <p:nvPicPr>
+          <p:cNvPr id="3" name="Image 0" descr="/home/claude/f4/img/minesec_sheet.png">    </p:cNvPr>
+          <p:cNvPicPr>
+            <a:picLocks noChangeAspect="1"/>
+          </p:cNvPicPr>
+          <p:nvPr/>
+        </p:nvPicPr>
+        <p:blipFill>
+          <a:blip r:embed="rId1"/>
+          <a:stretch>
+            <a:fillRect/>
+          </a:stretch>
+        </p:blipFill>
+        <p:spPr>
+          <a:xfrm>
+            <a:off x="0" y="658368"/>
+            <a:ext cx="5120640" cy="5833872"/>
+          </a:xfrm>
+          <a:prstGeom prst="rect">
+            <a:avLst/>
+          </a:prstGeom>
+        </p:spPr>
+      </p:pic>
+      <p:sp>
+        <p:nvSpPr>
+          <p:cNvPr id="4" name="Text 1"/>
+          <p:cNvSpPr/>
+          <p:nvPr/>
+        </p:nvSpPr>
+        <p:spPr>
+          <a:xfrm>
+            <a:off x="5349240" y="1005840"/>
+            <a:ext cx="6522415" cy="731520"/>
+          </a:xfrm>
+          <a:prstGeom prst="rect">
+            <a:avLst/>
+          </a:prstGeom>
+          <a:noFill/>
+          <a:ln/>
+        </p:spPr>
+        <p:txBody>
+          <a:bodyPr wrap="square" lIns="0" tIns="0" rIns="0" bIns="0" rtlCol="0" anchor="ctr">
+            <a:normAutofit/>
+          </a:bodyPr>
+          <a:lstStyle/>
+          <a:p>
+            <a:pPr algn="ctr" indent="0" marL="0">
+              <a:buNone/>
+            </a:pPr>
+            <a:r>
+              <a:rPr lang="en-US" sz="3600" b="1" dirty="0">
+                <a:solidFill>
+                  <a:srgbClr val="990011"/>
+                </a:solidFill>
+                <a:latin typeface="Times New Roman" pitchFamily="34" charset="0"/>
+                <a:ea typeface="Times New Roman" pitchFamily="34" charset="-122"/>
+                <a:cs typeface="Times New Roman" pitchFamily="34" charset="-120"/>
+              </a:rPr>
+              <a:t>Remediation</a:t>
+            </a:r>
+            <a:endParaRPr lang="en-US" sz="3600" dirty="0"/>
+          </a:p>
+        </p:txBody>
+      </p:sp>
+      <p:sp>
+        <p:nvSpPr>
+          <p:cNvPr id="5" name="Text 2"/>
+          <p:cNvSpPr/>
+          <p:nvPr/>
+        </p:nvSpPr>
+        <p:spPr>
+          <a:xfrm>
+            <a:off x="5349240" y="1783080"/>
+            <a:ext cx="6522415" cy="4663440"/>
+          </a:xfrm>
+          <a:prstGeom prst="rect">
+            <a:avLst/>
+          </a:prstGeom>
+          <a:noFill/>
+          <a:ln/>
+        </p:spPr>
+        <p:txBody>
+          <a:bodyPr wrap="square" lIns="0" tIns="0" rIns="0" bIns="0" rtlCol="0" anchor="t"/>
+          <a:lstStyle/>
+          <a:p>
+            <a:pPr algn="l" indent="0" marL="0">
+              <a:spcAft>
+                <a:spcPts val="800"/>
+              </a:spcAft>
+              <a:buNone/>
+            </a:pPr>
+            <a:r>
+              <a:rPr lang="en-US" sz="4000" b="1" dirty="0">
+                <a:solidFill>
+                  <a:srgbClr val="111111"/>
+                </a:solidFill>
+                <a:latin typeface="Times New Roman" pitchFamily="34" charset="0"/>
+                <a:ea typeface="Times New Roman" pitchFamily="34" charset="-122"/>
+                <a:cs typeface="Times New Roman" pitchFamily="34" charset="-120"/>
+              </a:rPr>
+              <a:t>Fill in the blanks:</a:t>
+            </a:r>
+            <a:endParaRPr lang="en-US" sz="4000" dirty="0"/>
+          </a:p>
+          <a:p>
+            <a:pPr algn="l" marL="342900" indent="-342900">
+              <a:spcAft>
+                <a:spcPts val="800"/>
+              </a:spcAft>
+              <a:buSzPct val="100000"/>
+              <a:buFont typeface="+mj-lt"/>
+              <a:buAutoNum type="arabicPeriod" startAt="1"/>
+            </a:pPr>
+            <a:r>
+              <a:rPr lang="en-US" sz="4000" dirty="0">
+                <a:solidFill>
+                  <a:srgbClr val="111111"/>
+                </a:solidFill>
+                <a:latin typeface="Times New Roman" pitchFamily="34" charset="0"/>
+                <a:ea typeface="Times New Roman" pitchFamily="34" charset="-122"/>
+                <a:cs typeface="Times New Roman" pitchFamily="34" charset="-120"/>
+              </a:rPr>
+              <a:t>Waste that rots naturally is ______.</a:t>
+            </a:r>
+            <a:endParaRPr lang="en-US" sz="4000" dirty="0"/>
+          </a:p>
+          <a:p>
+            <a:pPr algn="l" marL="342900" indent="-342900">
+              <a:spcAft>
+                <a:spcPts val="800"/>
+              </a:spcAft>
+              <a:buSzPct val="100000"/>
+              <a:buFont typeface="+mj-lt"/>
+              <a:buAutoNum type="arabicPeriod" startAt="1"/>
+            </a:pPr>
+            <a:r>
+              <a:rPr lang="en-US" sz="4000" dirty="0">
+                <a:solidFill>
+                  <a:srgbClr val="111111"/>
+                </a:solidFill>
+                <a:latin typeface="Times New Roman" pitchFamily="34" charset="0"/>
+                <a:ea typeface="Times New Roman" pitchFamily="34" charset="-122"/>
+                <a:cs typeface="Times New Roman" pitchFamily="34" charset="-120"/>
+              </a:rPr>
+              <a:t>Plastics are ______ waste.</a:t>
+            </a:r>
+            <a:endParaRPr lang="en-US" sz="4000" dirty="0"/>
+          </a:p>
+          <a:p>
+            <a:pPr algn="l" marL="342900" indent="-342900">
+              <a:spcAft>
+                <a:spcPts val="800"/>
+              </a:spcAft>
+              <a:buSzPct val="100000"/>
+              <a:buFont typeface="+mj-lt"/>
+              <a:buAutoNum type="arabicPeriod" startAt="1"/>
+            </a:pPr>
+            <a:r>
+              <a:rPr lang="en-US" sz="4000" dirty="0">
+                <a:solidFill>
+                  <a:srgbClr val="111111"/>
+                </a:solidFill>
+                <a:latin typeface="Times New Roman" pitchFamily="34" charset="0"/>
+                <a:ea typeface="Times New Roman" pitchFamily="34" charset="-122"/>
+                <a:cs typeface="Times New Roman" pitchFamily="34" charset="-120"/>
+              </a:rPr>
+              <a:t>Manure made from rotten waste is ______.</a:t>
+            </a:r>
+            <a:endParaRPr lang="en-US" sz="4000" dirty="0"/>
+          </a:p>
+        </p:txBody>
+      </p:sp>
+      <p:sp>
+        <p:nvSpPr>
+          <p:cNvPr id="25" name="Slide Number Placeholder 0"/>
+          <p:cNvSpPr>
+            <a:spLocks noGrp="1"/>
+          </p:cNvSpPr>
+          <p:nvPr>
+            <p:ph type="sldNum" sz="quarter" idx="4294967295"/>
+          </p:nvPr>
+        </p:nvSpPr>
+        <p:spPr>
+          <a:xfrm>
+            <a:off x="27432" y="91440"/>
+            <a:ext cx="585216" cy="475488"/>
+          </a:xfrm>
+          <a:prstGeom prst="rect">
+            <a:avLst/>
+          </a:prstGeom>
+          <a:extLst>
+            <a:ext uri="{C572A759-6A51-4108-AA02-DFA0A04FC94B}">
+              <ma14:wrappingTextBoxFlag xmlns:ma14="http://schemas.microsoft.com/office/mac/drawingml/2011/main" val="0"/>
+            </a:ext>
+          </a:extLst>
+        </p:spPr>
+        <p:txBody>
+          <a:bodyPr/>
+          <a:lstStyle>
+            <a:lvl1pPr>
+              <a:defRPr sz="2000">
+                <a:solidFill>
+                  <a:srgbClr val="FFFFFF"/>
+                </a:solidFill>
+                <a:latin typeface="Calibri"/>
+                <a:ea typeface="Calibri"/>
+                <a:cs typeface="Calibri"/>
+              </a:defRPr>
+            </a:lvl1pPr>
+          </a:lstStyle>
+          <a:p>
+            <a:pPr algn="ctr"/>
+            <a:fld id="{F7021451-1387-4CA6-816F-3879F97B5CBC}" type="slidenum">
+              <a:rPr b="1" lang="en-US"/>
+              <a:t>49</a:t>
+            </a:fld>
+            <a:endParaRPr lang="en-US"/>
+          </a:p>
+        </p:txBody>
+      </p:sp>
+    </p:spTree>
+  </p:cSld>
+  <p:clrMapOvr>
+    <a:masterClrMapping/>
+  </p:clrMapOvr>
+</p:sld>
+</file>
+
+<file path=ppt/slides/slide5.xml><?xml version="1.0" encoding="utf-8"?>
+<p:sld xmlns:a="http://schemas.openxmlformats.org/drawingml/2006/main" xmlns:r="http://schemas.openxmlformats.org/officeDocument/2006/relationships" xmlns:p="http://schemas.openxmlformats.org/presentationml/2006/main">
+  <p:cSld name="Slide 5">
+    <p:spTree>
+      <p:nvGrpSpPr>
+        <p:cNvPr id="1" name=""/>
+        <p:cNvGrpSpPr/>
+        <p:nvPr/>
+      </p:nvGrpSpPr>
+      <p:grpSpPr>
+        <a:xfrm>
+          <a:off x="0" y="0"/>
+          <a:ext cx="0" cy="0"/>
+          <a:chOff x="0" y="0"/>
+          <a:chExt cx="0" cy="0"/>
+        </a:xfrm>
+      </p:grpSpPr>
+      <p:sp>
+        <p:nvSpPr>
+          <p:cNvPr id="2" name="Text 0"/>
+          <p:cNvSpPr/>
+          <p:nvPr/>
+        </p:nvSpPr>
+        <p:spPr>
+          <a:xfrm>
+            <a:off x="457200" y="713232"/>
+            <a:ext cx="11368735" cy="274320"/>
+          </a:xfrm>
+          <a:prstGeom prst="rect">
+            <a:avLst/>
+          </a:prstGeom>
+          <a:noFill/>
+          <a:ln/>
+        </p:spPr>
+        <p:txBody>
+          <a:bodyPr wrap="square" lIns="0" tIns="0" rIns="0" bIns="0" rtlCol="0" anchor="ctr"/>
+          <a:lstStyle/>
+          <a:p>
+            <a:pPr algn="r" indent="0" marL="0">
+              <a:buNone/>
+            </a:pPr>
+            <a:r>
+              <a:rPr lang="en-US" sz="1400" b="1" dirty="0">
+                <a:solidFill>
+                  <a:srgbClr val="1C3F6E"/>
+                </a:solidFill>
+                <a:latin typeface="Calibri" pitchFamily="34" charset="0"/>
+                <a:ea typeface="Calibri" pitchFamily="34" charset="-122"/>
+                <a:cs typeface="Calibri" pitchFamily="34" charset="-120"/>
+              </a:rPr>
+              <a:t>HOMEWORK CORRECTION</a:t>
+            </a:r>
+            <a:endParaRPr lang="en-US" sz="1400" dirty="0"/>
+          </a:p>
+        </p:txBody>
+      </p:sp>
+      <p:pic>
+        <p:nvPicPr>
+          <p:cNvPr id="3" name="Image 0" descr="/home/claude/f4/img/minesec_sheet.png">    </p:cNvPr>
+          <p:cNvPicPr>
+            <a:picLocks noChangeAspect="1"/>
+          </p:cNvPicPr>
+          <p:nvPr/>
+        </p:nvPicPr>
+        <p:blipFill>
+          <a:blip r:embed="rId1"/>
+          <a:stretch>
+            <a:fillRect/>
+          </a:stretch>
+        </p:blipFill>
+        <p:spPr>
+          <a:xfrm>
+            <a:off x="0" y="658368"/>
+            <a:ext cx="3840480" cy="5833872"/>
+          </a:xfrm>
+          <a:prstGeom prst="rect">
+            <a:avLst/>
+          </a:prstGeom>
+        </p:spPr>
+      </p:pic>
+      <p:sp>
+        <p:nvSpPr>
+          <p:cNvPr id="4" name="Text 1"/>
+          <p:cNvSpPr/>
+          <p:nvPr/>
+        </p:nvSpPr>
+        <p:spPr>
+          <a:xfrm>
+            <a:off x="4069080" y="1005840"/>
+            <a:ext cx="7802575" cy="731520"/>
+          </a:xfrm>
+          <a:prstGeom prst="rect">
+            <a:avLst/>
+          </a:prstGeom>
+          <a:noFill/>
+          <a:ln/>
+        </p:spPr>
+        <p:txBody>
+          <a:bodyPr wrap="square" lIns="0" tIns="0" rIns="0" bIns="0" rtlCol="0" anchor="ctr">
+            <a:normAutofit/>
+          </a:bodyPr>
+          <a:lstStyle/>
+          <a:p>
+            <a:pPr algn="ctr" indent="0" marL="0">
+              <a:buNone/>
+            </a:pPr>
+            <a:r>
+              <a:rPr lang="en-US" sz="3600" b="1" dirty="0">
+                <a:solidFill>
+                  <a:srgbClr val="990011"/>
+                </a:solidFill>
+                <a:latin typeface="Times New Roman" pitchFamily="34" charset="0"/>
+                <a:ea typeface="Times New Roman" pitchFamily="34" charset="-122"/>
+                <a:cs typeface="Times New Roman" pitchFamily="34" charset="-120"/>
+              </a:rPr>
+              <a:t>Correction: Possible Answer</a:t>
+            </a:r>
+            <a:endParaRPr lang="en-US" sz="3600" dirty="0"/>
+          </a:p>
+        </p:txBody>
+      </p:sp>
+      <p:sp>
+        <p:nvSpPr>
+          <p:cNvPr id="5" name="Text 2"/>
+          <p:cNvSpPr/>
+          <p:nvPr/>
+        </p:nvSpPr>
+        <p:spPr>
+          <a:xfrm>
+            <a:off x="4069080" y="1783080"/>
+            <a:ext cx="7802575" cy="4663440"/>
+          </a:xfrm>
+          <a:prstGeom prst="rect">
+            <a:avLst/>
+          </a:prstGeom>
+          <a:noFill/>
+          <a:ln/>
+        </p:spPr>
+        <p:txBody>
+          <a:bodyPr wrap="square" lIns="0" tIns="0" rIns="0" bIns="0" rtlCol="0" anchor="t"/>
+          <a:lstStyle/>
+          <a:p>
+            <a:pPr algn="l" indent="0" marL="0">
+              <a:spcAft>
+                <a:spcPts val="800"/>
+              </a:spcAft>
+              <a:buNone/>
+            </a:pPr>
+            <a:r>
+              <a:rPr lang="en-US" sz="4000" dirty="0">
+                <a:solidFill>
+                  <a:srgbClr val="111111"/>
+                </a:solidFill>
+                <a:latin typeface="Times New Roman" pitchFamily="34" charset="0"/>
+                <a:ea typeface="Times New Roman" pitchFamily="34" charset="-122"/>
+                <a:cs typeface="Times New Roman" pitchFamily="34" charset="-120"/>
+              </a:rPr>
+              <a:t>A good report names each damaged place, describes the damage, gives its cause and proposes a solution, for example: "Behind the classrooms there is rubbish; students throw it there; we need dustbins."</a:t>
+            </a:r>
+            <a:endParaRPr lang="en-US" sz="4000" dirty="0"/>
+          </a:p>
+        </p:txBody>
+      </p:sp>
+      <p:sp>
+        <p:nvSpPr>
+          <p:cNvPr id="25" name="Slide Number Placeholder 0"/>
+          <p:cNvSpPr>
+            <a:spLocks noGrp="1"/>
+          </p:cNvSpPr>
+          <p:nvPr>
+            <p:ph type="sldNum" sz="quarter" idx="4294967295"/>
+          </p:nvPr>
+        </p:nvSpPr>
+        <p:spPr>
+          <a:xfrm>
+            <a:off x="27432" y="91440"/>
+            <a:ext cx="585216" cy="475488"/>
+          </a:xfrm>
+          <a:prstGeom prst="rect">
+            <a:avLst/>
+          </a:prstGeom>
+          <a:extLst>
+            <a:ext uri="{C572A759-6A51-4108-AA02-DFA0A04FC94B}">
+              <ma14:wrappingTextBoxFlag xmlns:ma14="http://schemas.microsoft.com/office/mac/drawingml/2011/main" val="0"/>
+            </a:ext>
+          </a:extLst>
+        </p:spPr>
+        <p:txBody>
+          <a:bodyPr/>
+          <a:lstStyle>
+            <a:lvl1pPr>
+              <a:defRPr sz="2000">
+                <a:solidFill>
+                  <a:srgbClr val="FFFFFF"/>
+                </a:solidFill>
+                <a:latin typeface="Calibri"/>
+                <a:ea typeface="Calibri"/>
+                <a:cs typeface="Calibri"/>
+              </a:defRPr>
+            </a:lvl1pPr>
+          </a:lstStyle>
+          <a:p>
+            <a:pPr algn="ctr"/>
+            <a:fld id="{F7021451-1387-4CA6-816F-3879F97B5CBC}" type="slidenum">
+              <a:rPr b="1" lang="en-US"/>
+              <a:t>5</a:t>
+            </a:fld>
+            <a:endParaRPr lang="en-US"/>
+          </a:p>
+        </p:txBody>
+      </p:sp>
+    </p:spTree>
+  </p:cSld>
+  <p:clrMapOvr>
+    <a:masterClrMapping/>
+  </p:clrMapOvr>
+</p:sld>
+</file>
+
+<file path=ppt/slides/slide50.xml><?xml version="1.0" encoding="utf-8"?>
+<p:sld xmlns:a="http://schemas.openxmlformats.org/drawingml/2006/main" xmlns:r="http://schemas.openxmlformats.org/officeDocument/2006/relationships" xmlns:p="http://schemas.openxmlformats.org/presentationml/2006/main">
+  <p:cSld name="Slide 50">
+    <p:spTree>
+      <p:nvGrpSpPr>
+        <p:cNvPr id="1" name=""/>
+        <p:cNvGrpSpPr/>
+        <p:nvPr/>
+      </p:nvGrpSpPr>
+      <p:grpSpPr>
+        <a:xfrm>
+          <a:off x="0" y="0"/>
+          <a:ext cx="0" cy="0"/>
+          <a:chOff x="0" y="0"/>
+          <a:chExt cx="0" cy="0"/>
+        </a:xfrm>
+      </p:grpSpPr>
+      <p:sp>
+        <p:nvSpPr>
+          <p:cNvPr id="2" name="Text 0"/>
+          <p:cNvSpPr/>
+          <p:nvPr/>
+        </p:nvSpPr>
+        <p:spPr>
+          <a:xfrm>
+            <a:off x="457200" y="713232"/>
+            <a:ext cx="11368735" cy="274320"/>
+          </a:xfrm>
+          <a:prstGeom prst="rect">
+            <a:avLst/>
+          </a:prstGeom>
+          <a:noFill/>
+          <a:ln/>
+        </p:spPr>
+        <p:txBody>
+          <a:bodyPr wrap="square" lIns="0" tIns="0" rIns="0" bIns="0" rtlCol="0" anchor="ctr"/>
+          <a:lstStyle/>
+          <a:p>
+            <a:pPr algn="r" indent="0" marL="0">
+              <a:buNone/>
+            </a:pPr>
+            <a:r>
+              <a:rPr lang="en-US" sz="1400" b="1" dirty="0">
+                <a:solidFill>
+                  <a:srgbClr val="1C3F6E"/>
+                </a:solidFill>
+                <a:latin typeface="Calibri" pitchFamily="34" charset="0"/>
+                <a:ea typeface="Calibri" pitchFamily="34" charset="-122"/>
+                <a:cs typeface="Calibri" pitchFamily="34" charset="-120"/>
+              </a:rPr>
+              <a:t>HOMEWORK</a:t>
+            </a:r>
+            <a:endParaRPr lang="en-US" sz="1400" dirty="0"/>
+          </a:p>
+        </p:txBody>
+      </p:sp>
+      <p:pic>
+        <p:nvPicPr>
+          <p:cNvPr id="3" name="Image 0" descr="/home/claude/f4/img/minesec_sheet.png">    </p:cNvPr>
+          <p:cNvPicPr>
+            <a:picLocks noChangeAspect="1"/>
+          </p:cNvPicPr>
+          <p:nvPr/>
+        </p:nvPicPr>
+        <p:blipFill>
+          <a:blip r:embed="rId1"/>
+          <a:stretch>
+            <a:fillRect/>
+          </a:stretch>
+        </p:blipFill>
+        <p:spPr>
+          <a:xfrm>
+            <a:off x="0" y="658368"/>
+            <a:ext cx="5120640" cy="5833872"/>
+          </a:xfrm>
+          <a:prstGeom prst="rect">
+            <a:avLst/>
+          </a:prstGeom>
+        </p:spPr>
+      </p:pic>
+      <p:sp>
+        <p:nvSpPr>
+          <p:cNvPr id="4" name="Text 1"/>
+          <p:cNvSpPr/>
+          <p:nvPr/>
+        </p:nvSpPr>
+        <p:spPr>
+          <a:xfrm>
+            <a:off x="5349240" y="1005840"/>
+            <a:ext cx="6522415" cy="731520"/>
+          </a:xfrm>
+          <a:prstGeom prst="rect">
+            <a:avLst/>
+          </a:prstGeom>
+          <a:noFill/>
+          <a:ln/>
+        </p:spPr>
+        <p:txBody>
+          <a:bodyPr wrap="square" lIns="0" tIns="0" rIns="0" bIns="0" rtlCol="0" anchor="ctr">
+            <a:normAutofit/>
+          </a:bodyPr>
+          <a:lstStyle/>
+          <a:p>
+            <a:pPr algn="ctr" indent="0" marL="0">
+              <a:buNone/>
+            </a:pPr>
+            <a:r>
+              <a:rPr lang="en-US" sz="3600" b="1" dirty="0">
+                <a:solidFill>
+                  <a:srgbClr val="990011"/>
+                </a:solidFill>
+                <a:latin typeface="Times New Roman" pitchFamily="34" charset="0"/>
+                <a:ea typeface="Times New Roman" pitchFamily="34" charset="-122"/>
+                <a:cs typeface="Times New Roman" pitchFamily="34" charset="-120"/>
+              </a:rPr>
+              <a:t>Homework</a:t>
+            </a:r>
+            <a:endParaRPr lang="en-US" sz="3600" dirty="0"/>
+          </a:p>
+        </p:txBody>
+      </p:sp>
+      <p:sp>
+        <p:nvSpPr>
+          <p:cNvPr id="5" name="Text 2"/>
+          <p:cNvSpPr/>
+          <p:nvPr/>
+        </p:nvSpPr>
+        <p:spPr>
+          <a:xfrm>
+            <a:off x="5349240" y="1783080"/>
+            <a:ext cx="6522415" cy="4663440"/>
+          </a:xfrm>
+          <a:prstGeom prst="rect">
+            <a:avLst/>
+          </a:prstGeom>
+          <a:noFill/>
+          <a:ln/>
+        </p:spPr>
+        <p:txBody>
+          <a:bodyPr wrap="square" lIns="0" tIns="0" rIns="0" bIns="0" rtlCol="0" anchor="t"/>
+          <a:lstStyle/>
+          <a:p>
+            <a:pPr algn="l" indent="0" marL="0">
+              <a:spcAft>
+                <a:spcPts val="800"/>
+              </a:spcAft>
+              <a:buNone/>
+            </a:pPr>
+            <a:r>
+              <a:rPr lang="en-US" sz="4000" dirty="0">
+                <a:solidFill>
+                  <a:srgbClr val="111111"/>
+                </a:solidFill>
+                <a:latin typeface="Times New Roman" pitchFamily="34" charset="0"/>
+                <a:ea typeface="Times New Roman" pitchFamily="34" charset="-122"/>
+                <a:cs typeface="Times New Roman" pitchFamily="34" charset="-120"/>
+              </a:rPr>
+              <a:t>At home, sort the waste of one day into two groups and write what you found in each group.</a:t>
+            </a:r>
+            <a:endParaRPr lang="en-US" sz="4000" dirty="0"/>
+          </a:p>
+        </p:txBody>
+      </p:sp>
+      <p:sp>
+        <p:nvSpPr>
+          <p:cNvPr id="25" name="Slide Number Placeholder 0"/>
+          <p:cNvSpPr>
+            <a:spLocks noGrp="1"/>
+          </p:cNvSpPr>
+          <p:nvPr>
+            <p:ph type="sldNum" sz="quarter" idx="4294967295"/>
+          </p:nvPr>
+        </p:nvSpPr>
+        <p:spPr>
+          <a:xfrm>
+            <a:off x="27432" y="91440"/>
+            <a:ext cx="585216" cy="475488"/>
+          </a:xfrm>
+          <a:prstGeom prst="rect">
+            <a:avLst/>
+          </a:prstGeom>
+          <a:extLst>
+            <a:ext uri="{C572A759-6A51-4108-AA02-DFA0A04FC94B}">
+              <ma14:wrappingTextBoxFlag xmlns:ma14="http://schemas.microsoft.com/office/mac/drawingml/2011/main" val="0"/>
+            </a:ext>
+          </a:extLst>
+        </p:spPr>
+        <p:txBody>
+          <a:bodyPr/>
+          <a:lstStyle>
+            <a:lvl1pPr>
+              <a:defRPr sz="2000">
+                <a:solidFill>
+                  <a:srgbClr val="FFFFFF"/>
+                </a:solidFill>
+                <a:latin typeface="Calibri"/>
+                <a:ea typeface="Calibri"/>
+                <a:cs typeface="Calibri"/>
+              </a:defRPr>
+            </a:lvl1pPr>
+          </a:lstStyle>
+          <a:p>
+            <a:pPr algn="ctr"/>
+            <a:fld id="{F7021451-1387-4CA6-816F-3879F97B5CBC}" type="slidenum">
+              <a:rPr b="1" lang="en-US"/>
+              <a:t>50</a:t>
+            </a:fld>
+            <a:endParaRPr lang="en-US"/>
+          </a:p>
+        </p:txBody>
+      </p:sp>
+    </p:spTree>
+  </p:cSld>
+  <p:clrMapOvr>
+    <a:masterClrMapping/>
+  </p:clrMapOvr>
+</p:sld>
+</file>
+
+<file path=ppt/slides/slide51.xml><?xml version="1.0" encoding="utf-8"?>
+<p:sld xmlns:a="http://schemas.openxmlformats.org/drawingml/2006/main" xmlns:r="http://schemas.openxmlformats.org/officeDocument/2006/relationships" xmlns:p="http://schemas.openxmlformats.org/presentationml/2006/main">
+  <p:cSld name="Slide 51">
+    <p:spTree>
+      <p:nvGrpSpPr>
+        <p:cNvPr id="1" name=""/>
+        <p:cNvGrpSpPr/>
+        <p:nvPr/>
+      </p:nvGrpSpPr>
+      <p:grpSpPr>
+        <a:xfrm>
+          <a:off x="0" y="0"/>
+          <a:ext cx="0" cy="0"/>
+          <a:chOff x="0" y="0"/>
+          <a:chExt cx="0" cy="0"/>
+        </a:xfrm>
+      </p:grpSpPr>
+      <p:sp>
+        <p:nvSpPr>
+          <p:cNvPr id="2" name="Text 0"/>
+          <p:cNvSpPr/>
+          <p:nvPr/>
+        </p:nvSpPr>
+        <p:spPr>
+          <a:xfrm>
+            <a:off x="457200" y="713232"/>
+            <a:ext cx="11368735" cy="274320"/>
+          </a:xfrm>
+          <a:prstGeom prst="rect">
+            <a:avLst/>
+          </a:prstGeom>
+          <a:noFill/>
+          <a:ln/>
+        </p:spPr>
+        <p:txBody>
+          <a:bodyPr wrap="square" lIns="0" tIns="0" rIns="0" bIns="0" rtlCol="0" anchor="ctr"/>
+          <a:lstStyle/>
+          <a:p>
+            <a:pPr algn="r" indent="0" marL="0">
+              <a:buNone/>
+            </a:pPr>
+            <a:r>
+              <a:rPr lang="en-US" sz="1400" b="1" dirty="0">
+                <a:solidFill>
+                  <a:srgbClr val="1C3F6E"/>
+                </a:solidFill>
+                <a:latin typeface="Calibri" pitchFamily="34" charset="0"/>
+                <a:ea typeface="Calibri" pitchFamily="34" charset="-122"/>
+                <a:cs typeface="Calibri" pitchFamily="34" charset="-120"/>
+              </a:rPr>
+              <a:t>NEXT LESSON</a:t>
+            </a:r>
+            <a:endParaRPr lang="en-US" sz="1400" dirty="0"/>
+          </a:p>
+        </p:txBody>
+      </p:sp>
+      <p:pic>
+        <p:nvPicPr>
+          <p:cNvPr id="3" name="Image 0" descr="/home/claude/f4/img/minesec_sheet.png">    </p:cNvPr>
+          <p:cNvPicPr>
+            <a:picLocks noChangeAspect="1"/>
+          </p:cNvPicPr>
+          <p:nvPr/>
+        </p:nvPicPr>
+        <p:blipFill>
+          <a:blip r:embed="rId1"/>
+          <a:stretch>
+            <a:fillRect/>
+          </a:stretch>
+        </p:blipFill>
+        <p:spPr>
+          <a:xfrm>
+            <a:off x="0" y="658368"/>
+            <a:ext cx="5120640" cy="5833872"/>
+          </a:xfrm>
+          <a:prstGeom prst="rect">
+            <a:avLst/>
+          </a:prstGeom>
+        </p:spPr>
+      </p:pic>
+      <p:sp>
+        <p:nvSpPr>
+          <p:cNvPr id="4" name="Text 1"/>
+          <p:cNvSpPr/>
+          <p:nvPr/>
+        </p:nvSpPr>
+        <p:spPr>
+          <a:xfrm>
+            <a:off x="5349240" y="1005840"/>
+            <a:ext cx="6522415" cy="731520"/>
+          </a:xfrm>
+          <a:prstGeom prst="rect">
+            <a:avLst/>
+          </a:prstGeom>
+          <a:noFill/>
+          <a:ln/>
+        </p:spPr>
+        <p:txBody>
+          <a:bodyPr wrap="square" lIns="0" tIns="0" rIns="0" bIns="0" rtlCol="0" anchor="ctr">
+            <a:normAutofit/>
+          </a:bodyPr>
+          <a:lstStyle/>
+          <a:p>
+            <a:pPr algn="ctr" indent="0" marL="0">
+              <a:buNone/>
+            </a:pPr>
+            <a:r>
+              <a:rPr lang="en-US" sz="3600" b="1" dirty="0">
+                <a:solidFill>
+                  <a:srgbClr val="990011"/>
+                </a:solidFill>
+                <a:latin typeface="Times New Roman" pitchFamily="34" charset="0"/>
+                <a:ea typeface="Times New Roman" pitchFamily="34" charset="-122"/>
+                <a:cs typeface="Times New Roman" pitchFamily="34" charset="-120"/>
+              </a:rPr>
+              <a:t>Next Lesson</a:t>
+            </a:r>
+            <a:endParaRPr lang="en-US" sz="3600" dirty="0"/>
+          </a:p>
+        </p:txBody>
+      </p:sp>
+      <p:sp>
+        <p:nvSpPr>
+          <p:cNvPr id="5" name="Text 2"/>
+          <p:cNvSpPr/>
+          <p:nvPr/>
+        </p:nvSpPr>
+        <p:spPr>
+          <a:xfrm>
+            <a:off x="5349240" y="1783080"/>
+            <a:ext cx="6522415" cy="4663440"/>
+          </a:xfrm>
+          <a:prstGeom prst="rect">
+            <a:avLst/>
+          </a:prstGeom>
+          <a:noFill/>
+          <a:ln/>
+        </p:spPr>
+        <p:txBody>
+          <a:bodyPr wrap="square" lIns="0" tIns="0" rIns="0" bIns="0" rtlCol="0" anchor="ctr"/>
+          <a:lstStyle/>
+          <a:p>
+            <a:pPr algn="ctr" indent="0" marL="0">
+              <a:spcAft>
+                <a:spcPts val="800"/>
+              </a:spcAft>
+              <a:buNone/>
+            </a:pPr>
+            <a:r>
+              <a:rPr lang="en-US" sz="4000" b="1" dirty="0">
+                <a:solidFill>
+                  <a:srgbClr val="111111"/>
+                </a:solidFill>
+                <a:latin typeface="Times New Roman" pitchFamily="34" charset="0"/>
+                <a:ea typeface="Times New Roman" pitchFamily="34" charset="-122"/>
+                <a:cs typeface="Times New Roman" pitchFamily="34" charset="-120"/>
+              </a:rPr>
+              <a:t>Our next lesson will be on:</a:t>
+            </a:r>
+            <a:endParaRPr lang="en-US" sz="4000" dirty="0"/>
+          </a:p>
+          <a:p>
+            <a:pPr algn="ctr" indent="0" marL="0">
+              <a:spcAft>
+                <a:spcPts val="800"/>
+              </a:spcAft>
+              <a:buNone/>
+            </a:pPr>
+            <a:r>
+              <a:rPr lang="en-US" sz="4000" b="1" dirty="0">
+                <a:solidFill>
+                  <a:srgbClr val="990011"/>
+                </a:solidFill>
+                <a:latin typeface="Times New Roman" pitchFamily="34" charset="0"/>
+                <a:ea typeface="Times New Roman" pitchFamily="34" charset="-122"/>
+                <a:cs typeface="Times New Roman" pitchFamily="34" charset="-120"/>
+              </a:rPr>
+              <a:t>Lesson 7: The Atmosphere</a:t>
+            </a:r>
+            <a:endParaRPr lang="en-US" sz="4000" dirty="0"/>
+          </a:p>
+        </p:txBody>
+      </p:sp>
+      <p:sp>
+        <p:nvSpPr>
+          <p:cNvPr id="25" name="Slide Number Placeholder 0"/>
+          <p:cNvSpPr>
+            <a:spLocks noGrp="1"/>
+          </p:cNvSpPr>
+          <p:nvPr>
+            <p:ph type="sldNum" sz="quarter" idx="4294967295"/>
+          </p:nvPr>
+        </p:nvSpPr>
+        <p:spPr>
+          <a:xfrm>
+            <a:off x="27432" y="91440"/>
+            <a:ext cx="585216" cy="475488"/>
+          </a:xfrm>
+          <a:prstGeom prst="rect">
+            <a:avLst/>
+          </a:prstGeom>
+          <a:extLst>
+            <a:ext uri="{C572A759-6A51-4108-AA02-DFA0A04FC94B}">
+              <ma14:wrappingTextBoxFlag xmlns:ma14="http://schemas.microsoft.com/office/mac/drawingml/2011/main" val="0"/>
+            </a:ext>
+          </a:extLst>
+        </p:spPr>
+        <p:txBody>
+          <a:bodyPr/>
+          <a:lstStyle>
+            <a:lvl1pPr>
+              <a:defRPr sz="2000">
+                <a:solidFill>
+                  <a:srgbClr val="FFFFFF"/>
+                </a:solidFill>
+                <a:latin typeface="Calibri"/>
+                <a:ea typeface="Calibri"/>
+                <a:cs typeface="Calibri"/>
+              </a:defRPr>
+            </a:lvl1pPr>
+          </a:lstStyle>
+          <a:p>
+            <a:pPr algn="ctr"/>
+            <a:fld id="{F7021451-1387-4CA6-816F-3879F97B5CBC}" type="slidenum">
+              <a:rPr b="1" lang="en-US"/>
+              <a:t>51</a:t>
+            </a:fld>
+            <a:endParaRPr lang="en-US"/>
+          </a:p>
+        </p:txBody>
+      </p:sp>
+    </p:spTree>
+  </p:cSld>
+  <p:clrMapOvr>
+    <a:masterClrMapping/>
+  </p:clrMapOvr>
+</p:sld>
+</file>
+
+<file path=ppt/slides/slide52.xml><?xml version="1.0" encoding="utf-8"?>
+<p:sld xmlns:a="http://schemas.openxmlformats.org/drawingml/2006/main" xmlns:r="http://schemas.openxmlformats.org/officeDocument/2006/relationships" xmlns:p="http://schemas.openxmlformats.org/presentationml/2006/main">
+  <p:cSld name="Slide 52">
+    <p:spTree>
+      <p:nvGrpSpPr>
+        <p:cNvPr id="1" name=""/>
+        <p:cNvGrpSpPr/>
+        <p:nvPr/>
+      </p:nvGrpSpPr>
+      <p:grpSpPr>
+        <a:xfrm>
+          <a:off x="0" y="0"/>
+          <a:ext cx="0" cy="0"/>
+          <a:chOff x="0" y="0"/>
+          <a:chExt cx="0" cy="0"/>
+        </a:xfrm>
+      </p:grpSpPr>
+      <p:sp>
+        <p:nvSpPr>
+          <p:cNvPr id="2" name="Text 0"/>
+          <p:cNvSpPr/>
+          <p:nvPr/>
+        </p:nvSpPr>
+        <p:spPr>
+          <a:xfrm>
+            <a:off x="457200" y="713232"/>
+            <a:ext cx="11368735" cy="274320"/>
+          </a:xfrm>
+          <a:prstGeom prst="rect">
+            <a:avLst/>
+          </a:prstGeom>
+          <a:noFill/>
+          <a:ln/>
+        </p:spPr>
+        <p:txBody>
+          <a:bodyPr wrap="square" lIns="0" tIns="0" rIns="0" bIns="0" rtlCol="0" anchor="ctr"/>
+          <a:lstStyle/>
+          <a:p>
+            <a:pPr algn="r" indent="0" marL="0">
+              <a:buNone/>
+            </a:pPr>
+            <a:r>
+              <a:rPr lang="en-US" sz="1400" b="1" dirty="0">
+                <a:solidFill>
+                  <a:srgbClr val="1C3F6E"/>
+                </a:solidFill>
+                <a:latin typeface="Calibri" pitchFamily="34" charset="0"/>
+                <a:ea typeface="Calibri" pitchFamily="34" charset="-122"/>
+                <a:cs typeface="Calibri" pitchFamily="34" charset="-120"/>
+              </a:rPr>
               <a:t>BILINGUAL GAME</a:t>
             </a:r>
             <a:endParaRPr lang="en-US" sz="1400" dirty="0"/>
@@ -16962,7 +18875,7 @@
       </p:sp>
       <p:graphicFrame>
         <p:nvGraphicFramePr>
-          <p:cNvPr id="49" name="Table 0"/>
+          <p:cNvPr id="53" name="Table 0"/>
           <p:cNvGraphicFramePr>
             <a:graphicFrameLocks noGrp="1"/>
           </p:cNvGraphicFramePr>
@@ -17998,7 +19911,7 @@
             <a:pPr algn="ctr"/>
             <a:fld id="{F7021451-1387-4CA6-816F-3879F97B5CBC}" type="slidenum">
               <a:rPr b="1" lang="en-US"/>
-              <a:t>48</a:t>
+              <a:t>52</a:t>
             </a:fld>
             <a:endParaRPr lang="en-US"/>
           </a:p>
@@ -18012,9 +19925,9 @@
 </p:sld>
 </file>
 
-<file path=ppt/slides/slide49.xml><?xml version="1.0" encoding="utf-8"?>
+<file path=ppt/slides/slide53.xml><?xml version="1.0" encoding="utf-8"?>
 <p:sld xmlns:a="http://schemas.openxmlformats.org/drawingml/2006/main" xmlns:r="http://schemas.openxmlformats.org/officeDocument/2006/relationships" xmlns:p="http://schemas.openxmlformats.org/presentationml/2006/main">
-  <p:cSld name="Slide 49">
+  <p:cSld name="Slide 53">
     <p:spTree>
       <p:nvGrpSpPr>
         <p:cNvPr id="1" name=""/>
@@ -18109,7 +20022,7 @@
       </p:sp>
       <p:graphicFrame>
         <p:nvGraphicFramePr>
-          <p:cNvPr id="50" name="Table 0"/>
+          <p:cNvPr id="54" name="Table 0"/>
           <p:cNvGraphicFramePr>
             <a:graphicFrameLocks noGrp="1"/>
           </p:cNvGraphicFramePr>
@@ -18495,7 +20408,7 @@
                           <a:ea typeface="Calibri" pitchFamily="34" charset="-122"/>
                           <a:cs typeface="Calibri" pitchFamily="34" charset="-120"/>
                         </a:rPr>
-                        <a:t>Define waste and give its types and sources. Sort waste into biodegradable and non-biodegradable. Dispose of each type of waste correctly.</a:t>
+                        <a:t>Define waste and give its types and sources. Sort waste into biodegradable and non-biodegradable. Dispose of each type of waste at the right site.</a:t>
                       </a:r>
                       <a:endParaRPr lang="en-US" sz="1600" dirty="0">
                         <a:latin typeface="Calibri" charset="0"/>
@@ -18731,7 +20644,7 @@
             <a:pPr algn="ctr"/>
             <a:fld id="{F7021451-1387-4CA6-816F-3879F97B5CBC}" type="slidenum">
               <a:rPr b="1" lang="en-US"/>
-              <a:t>49</a:t>
+              <a:t>53</a:t>
             </a:fld>
             <a:endParaRPr lang="en-US"/>
           </a:p>
@@ -18745,9 +20658,9 @@
 </p:sld>
 </file>
 
-<file path=ppt/slides/slide5.xml><?xml version="1.0" encoding="utf-8"?>
+<file path=ppt/slides/slide54.xml><?xml version="1.0" encoding="utf-8"?>
 <p:sld xmlns:a="http://schemas.openxmlformats.org/drawingml/2006/main" xmlns:r="http://schemas.openxmlformats.org/officeDocument/2006/relationships" xmlns:p="http://schemas.openxmlformats.org/presentationml/2006/main">
-  <p:cSld name="Slide 5">
+  <p:cSld name="Slide 54">
     <p:spTree>
       <p:nvGrpSpPr>
         <p:cNvPr id="1" name=""/>
@@ -18795,225 +20708,6 @@
                 <a:ea typeface="Calibri" pitchFamily="34" charset="-122"/>
                 <a:cs typeface="Calibri" pitchFamily="34" charset="-120"/>
               </a:rPr>
-              <a:t>HOMEWORK CORRECTION</a:t>
-            </a:r>
-            <a:endParaRPr lang="en-US" sz="1400" dirty="0"/>
-          </a:p>
-        </p:txBody>
-      </p:sp>
-      <p:pic>
-        <p:nvPicPr>
-          <p:cNvPr id="3" name="Image 0" descr="/home/claude/f4/img/minesec_sheet.png">    </p:cNvPr>
-          <p:cNvPicPr>
-            <a:picLocks noChangeAspect="1"/>
-          </p:cNvPicPr>
-          <p:nvPr/>
-        </p:nvPicPr>
-        <p:blipFill>
-          <a:blip r:embed="rId1"/>
-          <a:stretch>
-            <a:fillRect/>
-          </a:stretch>
-        </p:blipFill>
-        <p:spPr>
-          <a:xfrm>
-            <a:off x="0" y="658368"/>
-            <a:ext cx="3840480" cy="5833872"/>
-          </a:xfrm>
-          <a:prstGeom prst="rect">
-            <a:avLst/>
-          </a:prstGeom>
-        </p:spPr>
-      </p:pic>
-      <p:sp>
-        <p:nvSpPr>
-          <p:cNvPr id="4" name="Text 1"/>
-          <p:cNvSpPr/>
-          <p:nvPr/>
-        </p:nvSpPr>
-        <p:spPr>
-          <a:xfrm>
-            <a:off x="4069080" y="1005840"/>
-            <a:ext cx="7802575" cy="731520"/>
-          </a:xfrm>
-          <a:prstGeom prst="rect">
-            <a:avLst/>
-          </a:prstGeom>
-          <a:noFill/>
-          <a:ln/>
-        </p:spPr>
-        <p:txBody>
-          <a:bodyPr wrap="square" lIns="0" tIns="0" rIns="0" bIns="0" rtlCol="0" anchor="ctr">
-            <a:normAutofit/>
-          </a:bodyPr>
-          <a:lstStyle/>
-          <a:p>
-            <a:pPr algn="ctr" indent="0" marL="0">
-              <a:buNone/>
-            </a:pPr>
-            <a:r>
-              <a:rPr lang="en-US" sz="3600" b="1" dirty="0">
-                <a:solidFill>
-                  <a:srgbClr val="990011"/>
-                </a:solidFill>
-                <a:latin typeface="Times New Roman" pitchFamily="34" charset="0"/>
-                <a:ea typeface="Times New Roman" pitchFamily="34" charset="-122"/>
-                <a:cs typeface="Times New Roman" pitchFamily="34" charset="-120"/>
-              </a:rPr>
-              <a:t>Correction: Possible Answer</a:t>
-            </a:r>
-            <a:endParaRPr lang="en-US" sz="3600" dirty="0"/>
-          </a:p>
-        </p:txBody>
-      </p:sp>
-      <p:sp>
-        <p:nvSpPr>
-          <p:cNvPr id="5" name="Text 2"/>
-          <p:cNvSpPr/>
-          <p:nvPr/>
-        </p:nvSpPr>
-        <p:spPr>
-          <a:xfrm>
-            <a:off x="4069080" y="1783080"/>
-            <a:ext cx="7802575" cy="4663440"/>
-          </a:xfrm>
-          <a:prstGeom prst="rect">
-            <a:avLst/>
-          </a:prstGeom>
-          <a:noFill/>
-          <a:ln/>
-        </p:spPr>
-        <p:txBody>
-          <a:bodyPr wrap="square" lIns="0" tIns="0" rIns="0" bIns="0" rtlCol="0" anchor="t"/>
-          <a:lstStyle/>
-          <a:p>
-            <a:pPr algn="l" indent="0" marL="0">
-              <a:spcAft>
-                <a:spcPts val="800"/>
-              </a:spcAft>
-              <a:buNone/>
-            </a:pPr>
-            <a:r>
-              <a:rPr lang="en-US" sz="4000" dirty="0">
-                <a:solidFill>
-                  <a:srgbClr val="111111"/>
-                </a:solidFill>
-                <a:latin typeface="Times New Roman" pitchFamily="34" charset="0"/>
-                <a:ea typeface="Times New Roman" pitchFamily="34" charset="-122"/>
-                <a:cs typeface="Times New Roman" pitchFamily="34" charset="-120"/>
-              </a:rPr>
-              <a:t>A good report names each damaged place, describes the damage, gives its cause and proposes a solution, for example: "Behind the classrooms there is rubbish; students throw it there; we need dustbins."</a:t>
-            </a:r>
-            <a:endParaRPr lang="en-US" sz="4000" dirty="0"/>
-          </a:p>
-        </p:txBody>
-      </p:sp>
-      <p:sp>
-        <p:nvSpPr>
-          <p:cNvPr id="25" name="Slide Number Placeholder 0"/>
-          <p:cNvSpPr>
-            <a:spLocks noGrp="1"/>
-          </p:cNvSpPr>
-          <p:nvPr>
-            <p:ph type="sldNum" sz="quarter" idx="4294967295"/>
-          </p:nvPr>
-        </p:nvSpPr>
-        <p:spPr>
-          <a:xfrm>
-            <a:off x="27432" y="91440"/>
-            <a:ext cx="585216" cy="475488"/>
-          </a:xfrm>
-          <a:prstGeom prst="rect">
-            <a:avLst/>
-          </a:prstGeom>
-          <a:extLst>
-            <a:ext uri="{C572A759-6A51-4108-AA02-DFA0A04FC94B}">
-              <ma14:wrappingTextBoxFlag xmlns:ma14="http://schemas.microsoft.com/office/mac/drawingml/2011/main" val="0"/>
-            </a:ext>
-          </a:extLst>
-        </p:spPr>
-        <p:txBody>
-          <a:bodyPr/>
-          <a:lstStyle>
-            <a:lvl1pPr>
-              <a:defRPr sz="2000">
-                <a:solidFill>
-                  <a:srgbClr val="FFFFFF"/>
-                </a:solidFill>
-                <a:latin typeface="Calibri"/>
-                <a:ea typeface="Calibri"/>
-                <a:cs typeface="Calibri"/>
-              </a:defRPr>
-            </a:lvl1pPr>
-          </a:lstStyle>
-          <a:p>
-            <a:pPr algn="ctr"/>
-            <a:fld id="{F7021451-1387-4CA6-816F-3879F97B5CBC}" type="slidenum">
-              <a:rPr b="1" lang="en-US"/>
-              <a:t>5</a:t>
-            </a:fld>
-            <a:endParaRPr lang="en-US"/>
-          </a:p>
-        </p:txBody>
-      </p:sp>
-    </p:spTree>
-  </p:cSld>
-  <p:clrMapOvr>
-    <a:masterClrMapping/>
-  </p:clrMapOvr>
-</p:sld>
-</file>
-
-<file path=ppt/slides/slide50.xml><?xml version="1.0" encoding="utf-8"?>
-<p:sld xmlns:a="http://schemas.openxmlformats.org/drawingml/2006/main" xmlns:r="http://schemas.openxmlformats.org/officeDocument/2006/relationships" xmlns:p="http://schemas.openxmlformats.org/presentationml/2006/main">
-  <p:cSld name="Slide 50">
-    <p:spTree>
-      <p:nvGrpSpPr>
-        <p:cNvPr id="1" name=""/>
-        <p:cNvGrpSpPr/>
-        <p:nvPr/>
-      </p:nvGrpSpPr>
-      <p:grpSpPr>
-        <a:xfrm>
-          <a:off x="0" y="0"/>
-          <a:ext cx="0" cy="0"/>
-          <a:chOff x="0" y="0"/>
-          <a:chExt cx="0" cy="0"/>
-        </a:xfrm>
-      </p:grpSpPr>
-      <p:sp>
-        <p:nvSpPr>
-          <p:cNvPr id="2" name="Text 0"/>
-          <p:cNvSpPr/>
-          <p:nvPr/>
-        </p:nvSpPr>
-        <p:spPr>
-          <a:xfrm>
-            <a:off x="457200" y="713232"/>
-            <a:ext cx="11368735" cy="274320"/>
-          </a:xfrm>
-          <a:prstGeom prst="rect">
-            <a:avLst/>
-          </a:prstGeom>
-          <a:noFill/>
-          <a:ln/>
-        </p:spPr>
-        <p:txBody>
-          <a:bodyPr wrap="square" lIns="0" tIns="0" rIns="0" bIns="0" rtlCol="0" anchor="ctr"/>
-          <a:lstStyle/>
-          <a:p>
-            <a:pPr algn="r" indent="0" marL="0">
-              <a:buNone/>
-            </a:pPr>
-            <a:r>
-              <a:rPr lang="en-US" sz="1400" b="1" dirty="0">
-                <a:solidFill>
-                  <a:srgbClr val="1C3F6E"/>
-                </a:solidFill>
-                <a:latin typeface="Calibri" pitchFamily="34" charset="0"/>
-                <a:ea typeface="Calibri" pitchFamily="34" charset="-122"/>
-                <a:cs typeface="Calibri" pitchFamily="34" charset="-120"/>
-              </a:rPr>
               <a:t>LOGBOOK</a:t>
             </a:r>
             <a:endParaRPr lang="en-US" sz="1400" dirty="0"/>
@@ -19061,7 +20755,7 @@
       </p:sp>
       <p:graphicFrame>
         <p:nvGraphicFramePr>
-          <p:cNvPr id="51" name="Table 0"/>
+          <p:cNvPr id="55" name="Table 0"/>
           <p:cNvGraphicFramePr>
             <a:graphicFrameLocks noGrp="1"/>
           </p:cNvGraphicFramePr>
@@ -19171,7 +20865,7 @@
                           <a:ea typeface="Calibri" pitchFamily="34" charset="-122"/>
                           <a:cs typeface="Calibri" pitchFamily="34" charset="-120"/>
                         </a:rPr>
-                        <a:t>DEFINITIONS; Types and Sources of Waste; Managing Waste at School.</a:t>
+                        <a:t>DEFINITIONS; Types of Waste; Sources of Waste; Managing Waste at School.</a:t>
                       </a:r>
                       <a:endParaRPr lang="en-US" sz="1600" dirty="0">
                         <a:latin typeface="Calibri" charset="0"/>
@@ -19821,7 +21515,7 @@
             <a:pPr algn="ctr"/>
             <a:fld id="{F7021451-1387-4CA6-816F-3879F97B5CBC}" type="slidenum">
               <a:rPr b="1" lang="en-US"/>
-              <a:t>50</a:t>
+              <a:t>54</a:t>
             </a:fld>
             <a:endParaRPr lang="en-US"/>
           </a:p>
@@ -19835,9 +21529,9 @@
 </p:sld>
 </file>
 
-<file path=ppt/slides/slide51.xml><?xml version="1.0" encoding="utf-8"?>
+<file path=ppt/slides/slide55.xml><?xml version="1.0" encoding="utf-8"?>
 <p:sld xmlns:a="http://schemas.openxmlformats.org/drawingml/2006/main" xmlns:r="http://schemas.openxmlformats.org/officeDocument/2006/relationships" xmlns:p="http://schemas.openxmlformats.org/presentationml/2006/main">
-  <p:cSld name="Slide 51">
+  <p:cSld name="Slide 55">
     <p:spTree>
       <p:nvGrpSpPr>
         <p:cNvPr id="1" name=""/>
@@ -20056,7 +21750,7 @@
                 <a:ea typeface="Calibri" pitchFamily="34" charset="-122"/>
                 <a:cs typeface="Calibri" pitchFamily="34" charset="-120"/>
               </a:rPr>
-              <a:t>Without the projector (Activity 3): organise groups for the yard.</a:t>
+              <a:t>Without the projector (Activity 3): show a plastic bottle.</a:t>
             </a:r>
             <a:endParaRPr lang="en-US" sz="2000" dirty="0"/>
           </a:p>
@@ -20077,7 +21771,7 @@
                 <a:ea typeface="Calibri" pitchFamily="34" charset="-122"/>
                 <a:cs typeface="Calibri" pitchFamily="34" charset="-120"/>
               </a:rPr>
-              <a:t>Without the projector (Activity 4): mark three sites in the school.</a:t>
+              <a:t>Without the projector (Activity 4): organise groups for the yard.</a:t>
             </a:r>
             <a:endParaRPr lang="en-US" sz="2000" dirty="0"/>
           </a:p>
@@ -20146,7 +21840,7 @@
             <a:pPr algn="ctr"/>
             <a:fld id="{F7021451-1387-4CA6-816F-3879F97B5CBC}" type="slidenum">
               <a:rPr b="1" lang="en-US"/>
-              <a:t>51</a:t>
+              <a:t>55</a:t>
             </a:fld>
             <a:endParaRPr lang="en-US"/>
           </a:p>
@@ -20160,9 +21854,9 @@
 </p:sld>
 </file>
 
-<file path=ppt/slides/slide52.xml><?xml version="1.0" encoding="utf-8"?>
+<file path=ppt/slides/slide56.xml><?xml version="1.0" encoding="utf-8"?>
 <p:sld xmlns:a="http://schemas.openxmlformats.org/drawingml/2006/main" xmlns:r="http://schemas.openxmlformats.org/officeDocument/2006/relationships" xmlns:p="http://schemas.openxmlformats.org/presentationml/2006/main">
-  <p:cSld name="Slide 52">
+  <p:cSld name="Slide 56">
     <p:spTree>
       <p:nvGrpSpPr>
         <p:cNvPr id="1" name=""/>
@@ -20360,7 +22054,7 @@
                 <a:ea typeface="Calibri" pitchFamily="34" charset="-122"/>
                 <a:cs typeface="Calibri" pitchFamily="34" charset="-120"/>
               </a:rPr>
-              <a:t>Photo, Activity 3: “Do the evolution” by Marco Bellucci, CC BY 2.0, via Flickr (https://www.flickr.com/photos/50451886@N00/3382099741)</a:t>
+              <a:t>Photo, Activity 4: “Do the evolution” by Marco Bellucci, CC BY 2.0, via Flickr (https://www.flickr.com/photos/50451886@N00/3382099741)</a:t>
             </a:r>
             <a:endParaRPr lang="en-US" sz="1800" dirty="0"/>
           </a:p>
@@ -20450,7 +22144,7 @@
             <a:pPr algn="ctr"/>
             <a:fld id="{F7021451-1387-4CA6-816F-3879F97B5CBC}" type="slidenum">
               <a:rPr b="1" lang="en-US"/>
-              <a:t>52</a:t>
+              <a:t>56</a:t>
             </a:fld>
             <a:endParaRPr lang="en-US"/>
           </a:p>
@@ -21217,7 +22911,7 @@
                 <a:ea typeface="Times New Roman" pitchFamily="34" charset="-122"/>
                 <a:cs typeface="Times New Roman" pitchFamily="34" charset="-120"/>
               </a:rPr>
-              <a:t>Dispose of each type of waste correctly.</a:t>
+              <a:t>Dispose of each type of waste at the right site.</a:t>
             </a:r>
             <a:endParaRPr lang="en-US" sz="4000" dirty="0"/>
           </a:p>

--- a/lecons/F1/12_F1_M2_PW05_Solid_Waste_Management.pptx
+++ b/lecons/F1/12_F1_M2_PW05_Solid_Waste_Management.pptx
@@ -13688,7 +13688,7 @@
               <a:buNone/>
             </a:pPr>
             <a:r>
-              <a:rPr lang="en-US" sz="4000" b="1" dirty="0">
+              <a:rPr lang="en-US" sz="3200" b="1" dirty="0">
                 <a:solidFill>
                   <a:srgbClr val="111111"/>
                 </a:solidFill>
@@ -13698,7 +13698,7 @@
               </a:rPr>
               <a:t>Topic: Let's Preserve our Environment</a:t>
             </a:r>
-            <a:endParaRPr lang="en-US" sz="4000" dirty="0"/>
+            <a:endParaRPr lang="en-US" sz="3200" dirty="0"/>
           </a:p>
           <a:p>
             <a:pPr algn="l" indent="0" marL="0">
@@ -13708,7 +13708,7 @@
               <a:buNone/>
             </a:pPr>
             <a:r>
-              <a:rPr lang="en-US" sz="4000" b="1" dirty="0">
+              <a:rPr lang="en-US" sz="3200" b="1" dirty="0">
                 <a:solidFill>
                   <a:srgbClr val="111111"/>
                 </a:solidFill>
@@ -13718,7 +13718,7 @@
               </a:rPr>
               <a:t>Sub-topic: Natural Regions (Bio-climatic Zones) and their Degradation</a:t>
             </a:r>
-            <a:endParaRPr lang="en-US" sz="4000" dirty="0"/>
+            <a:endParaRPr lang="en-US" sz="3200" dirty="0"/>
           </a:p>
           <a:p>
             <a:pPr algn="l" indent="0" marL="0">
@@ -13728,7 +13728,7 @@
               <a:buNone/>
             </a:pPr>
             <a:r>
-              <a:rPr lang="en-US" sz="4000" b="1" dirty="0">
+              <a:rPr lang="en-US" sz="3200" b="1" dirty="0">
                 <a:solidFill>
                   <a:srgbClr val="990011"/>
                 </a:solidFill>
@@ -13738,7 +13738,7 @@
               </a:rPr>
               <a:t>Practical Work 5: Solid Waste Management</a:t>
             </a:r>
-            <a:endParaRPr lang="en-US" sz="4000" dirty="0"/>
+            <a:endParaRPr lang="en-US" sz="3200" dirty="0"/>
           </a:p>
         </p:txBody>
       </p:sp>

--- a/lecons/F1/12_F1_M2_PW05_Solid_Waste_Management.pptx
+++ b/lecons/F1/12_F1_M2_PW05_Solid_Waste_Management.pptx
@@ -3461,7 +3461,7 @@
           <a:p>
             <a:r>
               <a:rPr lang="en-US" dirty="0"/>
-              <a:t>Before we start the new lesson, let us correct the homework I gave you at the end of Guided Work 1: Degradation of the Natural Environment of the School. The question was: Write a short report (five lines) on the damage you observed around the school and your solutions. Take out your exercise books.</a:t>
+              <a:t>Before we start the new lesson, let us correct the homework I gave you at the end of Guided Work 1: Degradation of the Natural Environment of the School. The question was: Name the two types of solid waste. Take out your exercise books.</a:t>
             </a:r>
             <a:endParaRPr lang="en-US" dirty="0"/>
           </a:p>
@@ -4429,7 +4429,7 @@
           <a:p>
             <a:r>
               <a:rPr lang="en-US" dirty="0"/>
-              <a:t>Here is a good answer. A good report names each damaged place, describes the damage, gives its cause and proposes a solution, for example: "Behind the classrooms there is rubbish; students throw it there; we need dustbins.". Compare it with your own answer and correct your work in red.</a:t>
+              <a:t>Here is a good answer. Biodegradable and non-biodegradable waste. Compare it with your own answer and correct your work in red.</a:t>
             </a:r>
             <a:endParaRPr lang="en-US" dirty="0"/>
           </a:p>
@@ -4517,7 +4517,7 @@
           <a:p>
             <a:r>
               <a:rPr lang="en-US" dirty="0"/>
-              <a:t>For your homework: At home, sort the waste of one day into two groups and write what you found in each group. We shall correct it at the beginning of our next lesson.</a:t>
+              <a:t>For your homework: Name the two main gases of the atmosphere. We shall correct it at the beginning of our next lesson.</a:t>
             </a:r>
             <a:endParaRPr lang="en-US" dirty="0"/>
           </a:p>
@@ -15485,7 +15485,7 @@
                 <a:ea typeface="Times New Roman" pitchFamily="34" charset="-122"/>
                 <a:cs typeface="Times New Roman" pitchFamily="34" charset="-120"/>
               </a:rPr>
-              <a:t>Write a short report (five lines) on the damage you observed around the school and your solutions.</a:t>
+              <a:t>Name the two types of solid waste.</a:t>
             </a:r>
             <a:endParaRPr lang="en-US" sz="4000" dirty="0"/>
           </a:p>
@@ -18174,7 +18174,7 @@
         <p:spPr>
           <a:xfrm>
             <a:off x="0" y="658368"/>
-            <a:ext cx="3840480" cy="5833872"/>
+            <a:ext cx="5120640" cy="5833872"/>
           </a:xfrm>
           <a:prstGeom prst="rect">
             <a:avLst/>
@@ -18189,8 +18189,8 @@
         </p:nvSpPr>
         <p:spPr>
           <a:xfrm>
-            <a:off x="4069080" y="1005840"/>
-            <a:ext cx="7802575" cy="731520"/>
+            <a:off x="5349240" y="1005840"/>
+            <a:ext cx="6522415" cy="731520"/>
           </a:xfrm>
           <a:prstGeom prst="rect">
             <a:avLst/>
@@ -18230,8 +18230,8 @@
         </p:nvSpPr>
         <p:spPr>
           <a:xfrm>
-            <a:off x="4069080" y="1783080"/>
-            <a:ext cx="7802575" cy="4663440"/>
+            <a:off x="5349240" y="1783080"/>
+            <a:ext cx="6522415" cy="4663440"/>
           </a:xfrm>
           <a:prstGeom prst="rect">
             <a:avLst/>
@@ -18258,7 +18258,7 @@
                 <a:ea typeface="Times New Roman" pitchFamily="34" charset="-122"/>
                 <a:cs typeface="Times New Roman" pitchFamily="34" charset="-120"/>
               </a:rPr>
-              <a:t>A good report names each damaged place, describes the damage, gives its cause and proposes a solution, for example: "Behind the classrooms there is rubbish; students throw it there; we need dustbins."</a:t>
+              <a:t>Biodegradable and non-biodegradable waste.</a:t>
             </a:r>
             <a:endParaRPr lang="en-US" sz="4000" dirty="0"/>
           </a:p>
@@ -18477,7 +18477,7 @@
                 <a:ea typeface="Times New Roman" pitchFamily="34" charset="-122"/>
                 <a:cs typeface="Times New Roman" pitchFamily="34" charset="-120"/>
               </a:rPr>
-              <a:t>At home, sort the waste of one day into two groups and write what you found in each group.</a:t>
+              <a:t>Name the two main gases of the atmosphere.</a:t>
             </a:r>
             <a:endParaRPr lang="en-US" sz="4000" dirty="0"/>
           </a:p>
@@ -21141,7 +21141,7 @@
                           <a:ea typeface="Calibri" pitchFamily="34" charset="-122"/>
                           <a:cs typeface="Calibri" pitchFamily="34" charset="-120"/>
                         </a:rPr>
-                        <a:t>At home, sort the waste of one day into two groups and write what you found in each group.</a:t>
+                        <a:t>Name the two main gases of the atmosphere.</a:t>
                       </a:r>
                       <a:endParaRPr lang="en-US" sz="1600" dirty="0">
                         <a:latin typeface="Calibri" charset="0"/>
